--- a/docs/lab9/Лабораторная_9_Во_все_тяжкие.pptx
+++ b/docs/lab9/Лабораторная_9_Во_все_тяжкие.pptx
@@ -3093,7 +3093,7 @@
     <p:bg>
       <p:bgPr>
         <a:solidFill>
-          <a:srgbClr val="1A3C5E"/>
+          <a:srgbClr val="14211A"/>
         </a:solidFill>
         <a:effectLst/>
       </p:bgPr>
@@ -3113,14 +3113,14 @@
         </p:nvSpPr>
         <p:spPr>
           <a:xfrm>
-            <a:off x="0" y="2331720"/>
-            <a:ext cx="12191695" cy="2194560"/>
+            <a:off x="0" y="0"/>
+            <a:ext cx="201168" cy="6858000"/>
           </a:xfrm>
           <a:prstGeom prst="rect">
             <a:avLst/>
           </a:prstGeom>
           <a:solidFill>
-            <a:srgbClr val="FFFFFF"/>
+            <a:srgbClr val="5AA634"/>
           </a:solidFill>
           <a:ln>
             <a:noFill/>
@@ -3149,63 +3149,64 @@
           </a:p>
         </p:txBody>
       </p:sp>
-      <p:sp>
-        <p:nvSpPr>
-          <p:cNvPr id="3" name="TextBox 2"/>
+      <p:pic>
+        <p:nvPicPr>
+          <p:cNvPr id="3" name="Picture 2" descr="tile_br.png"/>
+          <p:cNvPicPr>
+            <a:picLocks noChangeAspect="1"/>
+          </p:cNvPicPr>
+          <p:nvPr/>
+        </p:nvPicPr>
+        <p:blipFill>
+          <a:blip r:embed="rId2"/>
+          <a:stretch>
+            <a:fillRect/>
+          </a:stretch>
+        </p:blipFill>
+        <p:spPr>
+          <a:xfrm>
+            <a:off x="640080" y="645975"/>
+            <a:ext cx="1371600" cy="1359809"/>
+          </a:xfrm>
+          <a:prstGeom prst="rect">
+            <a:avLst/>
+          </a:prstGeom>
+        </p:spPr>
+      </p:pic>
+      <p:pic>
+        <p:nvPicPr>
+          <p:cNvPr id="4" name="Picture 3" descr="tile_ba.png"/>
+          <p:cNvPicPr>
+            <a:picLocks noChangeAspect="1"/>
+          </p:cNvPicPr>
+          <p:nvPr/>
+        </p:nvPicPr>
+        <p:blipFill>
+          <a:blip r:embed="rId3"/>
+          <a:stretch>
+            <a:fillRect/>
+          </a:stretch>
+        </p:blipFill>
+        <p:spPr>
+          <a:xfrm>
+            <a:off x="2057400" y="645975"/>
+            <a:ext cx="1371600" cy="1359809"/>
+          </a:xfrm>
+          <a:prstGeom prst="rect">
+            <a:avLst/>
+          </a:prstGeom>
+        </p:spPr>
+      </p:pic>
+      <p:sp>
+        <p:nvSpPr>
+          <p:cNvPr id="5" name="TextBox 4"/>
           <p:cNvSpPr txBox="1"/>
           <p:nvPr/>
         </p:nvSpPr>
         <p:spPr>
           <a:xfrm>
-            <a:off x="731520" y="2468880"/>
-            <a:ext cx="10698480" cy="1920240"/>
-          </a:xfrm>
-          <a:prstGeom prst="rect">
-            <a:avLst/>
-          </a:prstGeom>
-          <a:noFill/>
-        </p:spPr>
-        <p:txBody>
-          <a:bodyPr wrap="square" anchor="ctr">
-            <a:spAutoFit/>
-          </a:bodyPr>
-          <a:lstStyle/>
-          <a:p>
-            <a:pPr algn="ctr"/>
-            <a:r>
-              <a:rPr sz="3400" b="1" i="0">
-                <a:solidFill>
-                  <a:srgbClr val="1A3C5E"/>
-                </a:solidFill>
-                <a:latin typeface="Calibri"/>
-              </a:rPr>
-              <a:t>Схема преступления по сериалу «Во все тяжкие»</a:t>
-            </a:r>
-          </a:p>
-          <a:p>
-            <a:pPr algn="ctr"/>
-            <a:r>
-              <a:rPr sz="1800" b="0" i="1">
-                <a:solidFill>
-                  <a:srgbClr val="C01C28"/>
-                </a:solidFill>
-                <a:latin typeface="Calibri"/>
-              </a:rPr>
-              <a:t>Визуальный анализ связей: персонажи • события • доказательства</a:t>
-            </a:r>
-          </a:p>
-        </p:txBody>
-      </p:sp>
-      <p:sp>
-        <p:nvSpPr>
-          <p:cNvPr id="4" name="TextBox 3"/>
-          <p:cNvSpPr txBox="1"/>
-          <p:nvPr/>
-        </p:nvSpPr>
-        <p:spPr>
-          <a:xfrm>
-            <a:off x="731520" y="4846320"/>
-            <a:ext cx="10698480" cy="1554480"/>
+            <a:off x="640080" y="2286000"/>
+            <a:ext cx="10972800" cy="2194560"/>
           </a:xfrm>
           <a:prstGeom prst="rect">
             <a:avLst/>
@@ -3218,39 +3219,219 @@
           </a:bodyPr>
           <a:lstStyle/>
           <a:p>
-            <a:pPr algn="ctr"/>
-            <a:r>
-              <a:rPr sz="1800" b="1" i="0">
+            <a:r>
+              <a:rPr sz="4600" b="1" i="0">
                 <a:solidFill>
                   <a:srgbClr val="FFFFFF"/>
                 </a:solidFill>
                 <a:latin typeface="Calibri"/>
               </a:rPr>
-              <a:t>Лабораторное занятие №9</a:t>
-            </a:r>
-          </a:p>
-          <a:p>
-            <a:pPr algn="ctr"/>
-            <a:r>
-              <a:rPr sz="1500" b="0" i="0">
-                <a:solidFill>
-                  <a:srgbClr val="FFFFFF"/>
-                </a:solidFill>
-                <a:latin typeface="Calibri"/>
-              </a:rPr>
-              <a:t>Создание схемы преступления в визуальной аналитической среде</a:t>
-            </a:r>
-          </a:p>
-          <a:p>
-            <a:pPr algn="ctr"/>
-            <a:r>
-              <a:rPr sz="1500" b="0" i="0">
-                <a:solidFill>
-                  <a:srgbClr val="FFFFFF"/>
-                </a:solidFill>
-                <a:latin typeface="Calibri"/>
-              </a:rPr>
-              <a:t>Выполнила: Могилёва Анастасия</a:t>
+              <a:t>Схема преступления</a:t>
+            </a:r>
+          </a:p>
+          <a:p>
+            <a:r>
+              <a:rPr sz="4000" b="1" i="0">
+                <a:solidFill>
+                  <a:srgbClr val="5AA634"/>
+                </a:solidFill>
+                <a:latin typeface="Calibri"/>
+              </a:rPr>
+              <a:t>по сериалу «Во все тяжкие»</a:t>
+            </a:r>
+          </a:p>
+          <a:p>
+            <a:pPr>
+              <a:spcBef>
+                <a:spcPts val="1000"/>
+              </a:spcBef>
+            </a:pPr>
+            <a:r>
+              <a:rPr sz="1800" b="0" i="1">
+                <a:solidFill>
+                  <a:srgbClr val="C7D92D"/>
+                </a:solidFill>
+                <a:latin typeface="Calibri"/>
+              </a:rPr>
+              <a:t>Визуальный анализ связей: персонажи · события · доказательства</a:t>
+            </a:r>
+          </a:p>
+        </p:txBody>
+      </p:sp>
+      <p:pic>
+        <p:nvPicPr>
+          <p:cNvPr id="6" name="Picture 5" descr="av_walt.png"/>
+          <p:cNvPicPr>
+            <a:picLocks noChangeAspect="1"/>
+          </p:cNvPicPr>
+          <p:nvPr/>
+        </p:nvPicPr>
+        <p:blipFill>
+          <a:blip r:embed="rId4"/>
+          <a:stretch>
+            <a:fillRect/>
+          </a:stretch>
+        </p:blipFill>
+        <p:spPr>
+          <a:xfrm>
+            <a:off x="640080" y="4892040"/>
+            <a:ext cx="960120" cy="960120"/>
+          </a:xfrm>
+          <a:prstGeom prst="rect">
+            <a:avLst/>
+          </a:prstGeom>
+        </p:spPr>
+      </p:pic>
+      <p:pic>
+        <p:nvPicPr>
+          <p:cNvPr id="7" name="Picture 6" descr="av_jesse.png"/>
+          <p:cNvPicPr>
+            <a:picLocks noChangeAspect="1"/>
+          </p:cNvPicPr>
+          <p:nvPr/>
+        </p:nvPicPr>
+        <p:blipFill>
+          <a:blip r:embed="rId5"/>
+          <a:stretch>
+            <a:fillRect/>
+          </a:stretch>
+        </p:blipFill>
+        <p:spPr>
+          <a:xfrm>
+            <a:off x="1719072" y="4892040"/>
+            <a:ext cx="960120" cy="960120"/>
+          </a:xfrm>
+          <a:prstGeom prst="rect">
+            <a:avLst/>
+          </a:prstGeom>
+        </p:spPr>
+      </p:pic>
+      <p:pic>
+        <p:nvPicPr>
+          <p:cNvPr id="8" name="Picture 7" descr="av_gus.png"/>
+          <p:cNvPicPr>
+            <a:picLocks noChangeAspect="1"/>
+          </p:cNvPicPr>
+          <p:nvPr/>
+        </p:nvPicPr>
+        <p:blipFill>
+          <a:blip r:embed="rId6"/>
+          <a:stretch>
+            <a:fillRect/>
+          </a:stretch>
+        </p:blipFill>
+        <p:spPr>
+          <a:xfrm>
+            <a:off x="2798064" y="4892040"/>
+            <a:ext cx="960120" cy="960120"/>
+          </a:xfrm>
+          <a:prstGeom prst="rect">
+            <a:avLst/>
+          </a:prstGeom>
+        </p:spPr>
+      </p:pic>
+      <p:pic>
+        <p:nvPicPr>
+          <p:cNvPr id="9" name="Picture 8" descr="av_hank.png"/>
+          <p:cNvPicPr>
+            <a:picLocks noChangeAspect="1"/>
+          </p:cNvPicPr>
+          <p:nvPr/>
+        </p:nvPicPr>
+        <p:blipFill>
+          <a:blip r:embed="rId7"/>
+          <a:stretch>
+            <a:fillRect/>
+          </a:stretch>
+        </p:blipFill>
+        <p:spPr>
+          <a:xfrm>
+            <a:off x="3877056" y="4892040"/>
+            <a:ext cx="960120" cy="960120"/>
+          </a:xfrm>
+          <a:prstGeom prst="rect">
+            <a:avLst/>
+          </a:prstGeom>
+        </p:spPr>
+      </p:pic>
+      <p:pic>
+        <p:nvPicPr>
+          <p:cNvPr id="10" name="Picture 9" descr="av_skyler.png"/>
+          <p:cNvPicPr>
+            <a:picLocks noChangeAspect="1"/>
+          </p:cNvPicPr>
+          <p:nvPr/>
+        </p:nvPicPr>
+        <p:blipFill>
+          <a:blip r:embed="rId8"/>
+          <a:stretch>
+            <a:fillRect/>
+          </a:stretch>
+        </p:blipFill>
+        <p:spPr>
+          <a:xfrm>
+            <a:off x="4956048" y="4892040"/>
+            <a:ext cx="960120" cy="960120"/>
+          </a:xfrm>
+          <a:prstGeom prst="rect">
+            <a:avLst/>
+          </a:prstGeom>
+        </p:spPr>
+      </p:pic>
+      <p:pic>
+        <p:nvPicPr>
+          <p:cNvPr id="11" name="Picture 10" descr="av_saul.png"/>
+          <p:cNvPicPr>
+            <a:picLocks noChangeAspect="1"/>
+          </p:cNvPicPr>
+          <p:nvPr/>
+        </p:nvPicPr>
+        <p:blipFill>
+          <a:blip r:embed="rId9"/>
+          <a:stretch>
+            <a:fillRect/>
+          </a:stretch>
+        </p:blipFill>
+        <p:spPr>
+          <a:xfrm>
+            <a:off x="6035040" y="4892040"/>
+            <a:ext cx="960120" cy="960120"/>
+          </a:xfrm>
+          <a:prstGeom prst="rect">
+            <a:avLst/>
+          </a:prstGeom>
+        </p:spPr>
+      </p:pic>
+      <p:sp>
+        <p:nvSpPr>
+          <p:cNvPr id="12" name="TextBox 11"/>
+          <p:cNvSpPr txBox="1"/>
+          <p:nvPr/>
+        </p:nvSpPr>
+        <p:spPr>
+          <a:xfrm>
+            <a:off x="640080" y="6126480"/>
+            <a:ext cx="10972800" cy="640080"/>
+          </a:xfrm>
+          <a:prstGeom prst="rect">
+            <a:avLst/>
+          </a:prstGeom>
+          <a:noFill/>
+        </p:spPr>
+        <p:txBody>
+          <a:bodyPr wrap="square">
+            <a:spAutoFit/>
+          </a:bodyPr>
+          <a:lstStyle/>
+          <a:p>
+            <a:r>
+              <a:rPr sz="1400" b="0" i="0">
+                <a:solidFill>
+                  <a:srgbClr val="C9D6CC"/>
+                </a:solidFill>
+                <a:latin typeface="Calibri"/>
+              </a:rPr>
+              <a:t>Лабораторное занятие №9  ·  IBM i2 Analyst's Notebook  ·  Выполнила: Могилёва Анастасия</a:t>
             </a:r>
           </a:p>
         </p:txBody>
@@ -3269,7 +3450,7 @@
     <p:bg>
       <p:bgPr>
         <a:solidFill>
-          <a:srgbClr val="1A3C5E"/>
+          <a:srgbClr val="14211A"/>
         </a:solidFill>
         <a:effectLst/>
       </p:bgPr>
@@ -3283,14 +3464,106 @@
       <p:grpSpPr/>
       <p:sp>
         <p:nvSpPr>
-          <p:cNvPr id="2" name="TextBox 1"/>
+          <p:cNvPr id="2" name="Rectangle 1"/>
+          <p:cNvSpPr/>
+          <p:nvPr/>
+        </p:nvSpPr>
+        <p:spPr>
+          <a:xfrm>
+            <a:off x="0" y="0"/>
+            <a:ext cx="201168" cy="6858000"/>
+          </a:xfrm>
+          <a:prstGeom prst="rect">
+            <a:avLst/>
+          </a:prstGeom>
+          <a:solidFill>
+            <a:srgbClr val="5AA634"/>
+          </a:solidFill>
+          <a:ln>
+            <a:noFill/>
+          </a:ln>
+          <a:effectLst/>
+        </p:spPr>
+        <p:style>
+          <a:lnRef idx="1">
+            <a:schemeClr val="accent1"/>
+          </a:lnRef>
+          <a:fillRef idx="3">
+            <a:schemeClr val="accent1"/>
+          </a:fillRef>
+          <a:effectRef idx="2">
+            <a:schemeClr val="accent1"/>
+          </a:effectRef>
+          <a:fontRef idx="minor">
+            <a:schemeClr val="lt1"/>
+          </a:fontRef>
+        </p:style>
+        <p:txBody>
+          <a:bodyPr rtlCol="0" anchor="ctr"/>
+          <a:lstStyle/>
+          <a:p>
+            <a:pPr algn="ctr"/>
+          </a:p>
+        </p:txBody>
+      </p:sp>
+      <p:pic>
+        <p:nvPicPr>
+          <p:cNvPr id="3" name="Picture 2" descr="tile_br.png"/>
+          <p:cNvPicPr>
+            <a:picLocks noChangeAspect="1"/>
+          </p:cNvPicPr>
+          <p:nvPr/>
+        </p:nvPicPr>
+        <p:blipFill>
+          <a:blip r:embed="rId2"/>
+          <a:stretch>
+            <a:fillRect/>
+          </a:stretch>
+        </p:blipFill>
+        <p:spPr>
+          <a:xfrm>
+            <a:off x="10607040" y="552963"/>
+            <a:ext cx="1005840" cy="997193"/>
+          </a:xfrm>
+          <a:prstGeom prst="rect">
+            <a:avLst/>
+          </a:prstGeom>
+        </p:spPr>
+      </p:pic>
+      <p:pic>
+        <p:nvPicPr>
+          <p:cNvPr id="4" name="Picture 3" descr="tile_ba.png"/>
+          <p:cNvPicPr>
+            <a:picLocks noChangeAspect="1"/>
+          </p:cNvPicPr>
+          <p:nvPr/>
+        </p:nvPicPr>
+        <p:blipFill>
+          <a:blip r:embed="rId3"/>
+          <a:stretch>
+            <a:fillRect/>
+          </a:stretch>
+        </p:blipFill>
+        <p:spPr>
+          <a:xfrm>
+            <a:off x="10607040" y="1695963"/>
+            <a:ext cx="1005840" cy="997193"/>
+          </a:xfrm>
+          <a:prstGeom prst="rect">
+            <a:avLst/>
+          </a:prstGeom>
+        </p:spPr>
+      </p:pic>
+      <p:sp>
+        <p:nvSpPr>
+          <p:cNvPr id="5" name="TextBox 4"/>
           <p:cNvSpPr txBox="1"/>
           <p:nvPr/>
         </p:nvSpPr>
         <p:spPr>
           <a:xfrm>
-            <a:off x="822960" y="640080"/>
-            <a:ext cx="10515600" cy="914400"/>
+            <a:off x="640080" y="548640"/>
+            <a:ext cx="9601200" cy="914400"/>
           </a:xfrm>
           <a:prstGeom prst="rect">
             <a:avLst/>
@@ -3304,7 +3577,7 @@
           <a:lstStyle/>
           <a:p>
             <a:r>
-              <a:rPr sz="3400" b="1" i="0">
+              <a:rPr sz="4000" b="1" i="0">
                 <a:solidFill>
                   <a:srgbClr val="FFFFFF"/>
                 </a:solidFill>
@@ -3317,14 +3590,14 @@
       </p:sp>
       <p:sp>
         <p:nvSpPr>
-          <p:cNvPr id="3" name="TextBox 2"/>
+          <p:cNvPr id="6" name="TextBox 5"/>
           <p:cNvSpPr txBox="1"/>
           <p:nvPr/>
         </p:nvSpPr>
         <p:spPr>
           <a:xfrm>
             <a:off x="640080" y="1828800"/>
-            <a:ext cx="10972800" cy="4937760"/>
+            <a:ext cx="10972800" cy="4754880"/>
           </a:xfrm>
           <a:prstGeom prst="rect">
             <a:avLst/>
@@ -3345,11 +3618,20 @@
             <a:r>
               <a:rPr sz="2000" b="1" i="0">
                 <a:solidFill>
+                  <a:srgbClr val="5AA634"/>
+                </a:solidFill>
+                <a:latin typeface="Calibri"/>
+              </a:rPr>
+              <a:t>●  </a:t>
+            </a:r>
+            <a:r>
+              <a:rPr sz="2000" b="1" i="0">
+                <a:solidFill>
                   <a:srgbClr val="FFFFFF"/>
                 </a:solidFill>
                 <a:latin typeface="Calibri"/>
               </a:rPr>
-              <a:t>• Визуальная аналитическая среда (link-анализ) позволяет компактно представить сложную криминальную сеть.</a:t>
+              <a:t>Визуальная аналитическая среда (link-анализ в IBM i2) компактно представляет сложную криминальную сеть.</a:t>
             </a:r>
           </a:p>
           <a:p>
@@ -3359,13 +3641,22 @@
               </a:spcAft>
             </a:pPr>
             <a:r>
+              <a:rPr sz="2000" b="1" i="0">
+                <a:solidFill>
+                  <a:srgbClr val="5AA634"/>
+                </a:solidFill>
+                <a:latin typeface="Calibri"/>
+              </a:rPr>
+              <a:t>●  </a:t>
+            </a:r>
+            <a:r>
               <a:rPr sz="2000" b="0" i="0">
                 <a:solidFill>
-                  <a:srgbClr val="E8EEF6"/>
-                </a:solidFill>
-                <a:latin typeface="Calibri"/>
-              </a:rPr>
-              <a:t>• Схема выявляет ключевую фигуру, характер связей и роль каждой улики в раскрытии преступления.</a:t>
+                  <a:srgbClr val="DCE6DD"/>
+                </a:solidFill>
+                <a:latin typeface="Calibri"/>
+              </a:rPr>
+              <a:t>Схема выявляет ключевую фигуру, характер связей и роль каждой улики в раскрытии преступления.</a:t>
             </a:r>
           </a:p>
           <a:p>
@@ -3375,13 +3666,22 @@
               </a:spcAft>
             </a:pPr>
             <a:r>
+              <a:rPr sz="2000" b="1" i="0">
+                <a:solidFill>
+                  <a:srgbClr val="5AA634"/>
+                </a:solidFill>
+                <a:latin typeface="Calibri"/>
+              </a:rPr>
+              <a:t>●  </a:t>
+            </a:r>
+            <a:r>
               <a:rPr sz="2000" b="0" i="0">
                 <a:solidFill>
-                  <a:srgbClr val="E8EEF6"/>
-                </a:solidFill>
-                <a:latin typeface="Calibri"/>
-              </a:rPr>
-              <a:t>• Метод применим в реальной аналитике: расследования, OSINT, анализ организованных групп.</a:t>
+                  <a:srgbClr val="DCE6DD"/>
+                </a:solidFill>
+                <a:latin typeface="Calibri"/>
+              </a:rPr>
+              <a:t>Метод применим в реальной аналитике: расследования, OSINT, анализ организованных групп.</a:t>
             </a:r>
           </a:p>
           <a:p>
@@ -3393,24 +3693,33 @@
             <a:r>
               <a:rPr sz="2000" b="1" i="0">
                 <a:solidFill>
-                  <a:srgbClr val="FFE08A"/>
-                </a:solidFill>
-                <a:latin typeface="Calibri"/>
-              </a:rPr>
-              <a:t>• Результат работы: схема преступления, отчёт и презентация на 10 слайдов.</a:t>
-            </a:r>
-          </a:p>
-        </p:txBody>
-      </p:sp>
-      <p:sp>
-        <p:nvSpPr>
-          <p:cNvPr id="4" name="TextBox 3"/>
+                  <a:srgbClr val="5AA634"/>
+                </a:solidFill>
+                <a:latin typeface="Calibri"/>
+              </a:rPr>
+              <a:t>●  </a:t>
+            </a:r>
+            <a:r>
+              <a:rPr sz="2000" b="1" i="0">
+                <a:solidFill>
+                  <a:srgbClr val="C7D92D"/>
+                </a:solidFill>
+                <a:latin typeface="Calibri"/>
+              </a:rPr>
+              <a:t>Результат работы: круговая схема преступления, отчёт и презентация.</a:t>
+            </a:r>
+          </a:p>
+        </p:txBody>
+      </p:sp>
+      <p:sp>
+        <p:nvSpPr>
+          <p:cNvPr id="7" name="TextBox 6"/>
           <p:cNvSpPr txBox="1"/>
           <p:nvPr/>
         </p:nvSpPr>
         <p:spPr>
           <a:xfrm>
-            <a:off x="822960" y="5852160"/>
+            <a:off x="640080" y="5943600"/>
             <a:ext cx="10515600" cy="640080"/>
           </a:xfrm>
           <a:prstGeom prst="rect">
@@ -3425,7 +3734,7 @@
           <a:lstStyle/>
           <a:p>
             <a:r>
-              <a:rPr sz="2200" b="1" i="1">
+              <a:rPr sz="2400" b="1" i="1">
                 <a:solidFill>
                   <a:srgbClr val="FFFFFF"/>
                 </a:solidFill>
@@ -3471,13 +3780,13 @@
         <p:spPr>
           <a:xfrm>
             <a:off x="0" y="0"/>
-            <a:ext cx="12191695" cy="1051560"/>
+            <a:ext cx="12191695" cy="1024128"/>
           </a:xfrm>
           <a:prstGeom prst="rect">
             <a:avLst/>
           </a:prstGeom>
           <a:solidFill>
-            <a:srgbClr val="1A3C5E"/>
+            <a:srgbClr val="14211A"/>
           </a:solidFill>
           <a:ln>
             <a:noFill/>
@@ -3508,14 +3817,106 @@
       </p:sp>
       <p:sp>
         <p:nvSpPr>
-          <p:cNvPr id="3" name="TextBox 2"/>
+          <p:cNvPr id="3" name="Rectangle 2"/>
+          <p:cNvSpPr/>
+          <p:nvPr/>
+        </p:nvSpPr>
+        <p:spPr>
+          <a:xfrm>
+            <a:off x="0" y="0"/>
+            <a:ext cx="164592" cy="1024128"/>
+          </a:xfrm>
+          <a:prstGeom prst="rect">
+            <a:avLst/>
+          </a:prstGeom>
+          <a:solidFill>
+            <a:srgbClr val="5AA634"/>
+          </a:solidFill>
+          <a:ln>
+            <a:noFill/>
+          </a:ln>
+          <a:effectLst/>
+        </p:spPr>
+        <p:style>
+          <a:lnRef idx="1">
+            <a:schemeClr val="accent1"/>
+          </a:lnRef>
+          <a:fillRef idx="3">
+            <a:schemeClr val="accent1"/>
+          </a:fillRef>
+          <a:effectRef idx="2">
+            <a:schemeClr val="accent1"/>
+          </a:effectRef>
+          <a:fontRef idx="minor">
+            <a:schemeClr val="lt1"/>
+          </a:fontRef>
+        </p:style>
+        <p:txBody>
+          <a:bodyPr rtlCol="0" anchor="ctr"/>
+          <a:lstStyle/>
+          <a:p>
+            <a:pPr algn="ctr"/>
+          </a:p>
+        </p:txBody>
+      </p:sp>
+      <p:pic>
+        <p:nvPicPr>
+          <p:cNvPr id="4" name="Picture 3" descr="tile_br.png"/>
+          <p:cNvPicPr>
+            <a:picLocks noChangeAspect="1"/>
+          </p:cNvPicPr>
+          <p:nvPr/>
+        </p:nvPicPr>
+        <p:blipFill>
+          <a:blip r:embed="rId2"/>
+          <a:stretch>
+            <a:fillRect/>
+          </a:stretch>
+        </p:blipFill>
+        <p:spPr>
+          <a:xfrm>
+            <a:off x="10927080" y="149448"/>
+            <a:ext cx="731520" cy="725231"/>
+          </a:xfrm>
+          <a:prstGeom prst="rect">
+            <a:avLst/>
+          </a:prstGeom>
+        </p:spPr>
+      </p:pic>
+      <p:pic>
+        <p:nvPicPr>
+          <p:cNvPr id="5" name="Picture 4" descr="tile_ba.png"/>
+          <p:cNvPicPr>
+            <a:picLocks noChangeAspect="1"/>
+          </p:cNvPicPr>
+          <p:nvPr/>
+        </p:nvPicPr>
+        <p:blipFill>
+          <a:blip r:embed="rId3"/>
+          <a:stretch>
+            <a:fillRect/>
+          </a:stretch>
+        </p:blipFill>
+        <p:spPr>
+          <a:xfrm>
+            <a:off x="11430000" y="149448"/>
+            <a:ext cx="731520" cy="725231"/>
+          </a:xfrm>
+          <a:prstGeom prst="rect">
+            <a:avLst/>
+          </a:prstGeom>
+        </p:spPr>
+      </p:pic>
+      <p:sp>
+        <p:nvSpPr>
+          <p:cNvPr id="6" name="TextBox 5"/>
           <p:cNvSpPr txBox="1"/>
           <p:nvPr/>
         </p:nvSpPr>
         <p:spPr>
           <a:xfrm>
-            <a:off x="457200" y="109728"/>
-            <a:ext cx="11247120" cy="868680"/>
+            <a:off x="411480" y="91440"/>
+            <a:ext cx="10241280" cy="868680"/>
           </a:xfrm>
           <a:prstGeom prst="rect">
             <a:avLst/>
@@ -3529,7 +3930,7 @@
           <a:lstStyle/>
           <a:p>
             <a:r>
-              <a:rPr sz="3000" b="1" i="0">
+              <a:rPr sz="2800" b="1" i="0">
                 <a:solidFill>
                   <a:srgbClr val="FFFFFF"/>
                 </a:solidFill>
@@ -3542,14 +3943,14 @@
       </p:sp>
       <p:sp>
         <p:nvSpPr>
-          <p:cNvPr id="4" name="TextBox 3"/>
+          <p:cNvPr id="7" name="TextBox 6"/>
           <p:cNvSpPr txBox="1"/>
           <p:nvPr/>
         </p:nvSpPr>
         <p:spPr>
           <a:xfrm>
-            <a:off x="640080" y="1463040"/>
-            <a:ext cx="10972800" cy="4937760"/>
+            <a:off x="640080" y="1417320"/>
+            <a:ext cx="10972800" cy="4754880"/>
           </a:xfrm>
           <a:prstGeom prst="rect">
             <a:avLst/>
@@ -3570,11 +3971,20 @@
             <a:r>
               <a:rPr sz="1900" b="1" i="0">
                 <a:solidFill>
-                  <a:srgbClr val="1A3C5E"/>
-                </a:solidFill>
-                <a:latin typeface="Calibri"/>
-              </a:rPr>
-              <a:t>• Цель: построить схему преступления, отображающую связи между персонажами, событиями и доказательствами, средствами визуальной аналитической среды.</a:t>
+                  <a:srgbClr val="5AA634"/>
+                </a:solidFill>
+                <a:latin typeface="Calibri"/>
+              </a:rPr>
+              <a:t>●  </a:t>
+            </a:r>
+            <a:r>
+              <a:rPr sz="1900" b="1" i="0">
+                <a:solidFill>
+                  <a:srgbClr val="1E2A24"/>
+                </a:solidFill>
+                <a:latin typeface="Calibri"/>
+              </a:rPr>
+              <a:t>Цель: построить схему преступления, отражающую связи между персонажами, событиями и доказательствами, средствами визуальной аналитической среды.</a:t>
             </a:r>
           </a:p>
           <a:p>
@@ -3586,11 +3996,20 @@
             <a:r>
               <a:rPr sz="1900" b="1" i="0">
                 <a:solidFill>
-                  <a:srgbClr val="222222"/>
-                </a:solidFill>
-                <a:latin typeface="Calibri"/>
-              </a:rPr>
-              <a:t>• Задачи:</a:t>
+                  <a:srgbClr val="5AA634"/>
+                </a:solidFill>
+                <a:latin typeface="Calibri"/>
+              </a:rPr>
+              <a:t>●  </a:t>
+            </a:r>
+            <a:r>
+              <a:rPr sz="1900" b="1" i="0">
+                <a:solidFill>
+                  <a:srgbClr val="3E7A24"/>
+                </a:solidFill>
+                <a:latin typeface="Calibri"/>
+              </a:rPr>
+              <a:t>Задачи:</a:t>
             </a:r>
           </a:p>
           <a:p>
@@ -3600,13 +4019,22 @@
               </a:spcAft>
             </a:pPr>
             <a:r>
+              <a:rPr sz="1700" b="1" i="0">
+                <a:solidFill>
+                  <a:srgbClr val="5B6B63"/>
+                </a:solidFill>
+                <a:latin typeface="Calibri"/>
+              </a:rPr>
+              <a:t>–  </a:t>
+            </a:r>
+            <a:r>
               <a:rPr sz="1700" b="0" i="0">
                 <a:solidFill>
-                  <a:srgbClr val="222222"/>
-                </a:solidFill>
-                <a:latin typeface="Calibri"/>
-              </a:rPr>
-              <a:t>– выбрать произведение с детективной/криминальной линией;</a:t>
+                  <a:srgbClr val="1E2A24"/>
+                </a:solidFill>
+                <a:latin typeface="Calibri"/>
+              </a:rPr>
+              <a:t>выбрать произведение с криминальной линией — сериал «Во все тяжкие»;</a:t>
             </a:r>
           </a:p>
           <a:p>
@@ -3616,13 +4044,22 @@
               </a:spcAft>
             </a:pPr>
             <a:r>
+              <a:rPr sz="1700" b="1" i="0">
+                <a:solidFill>
+                  <a:srgbClr val="5B6B63"/>
+                </a:solidFill>
+                <a:latin typeface="Calibri"/>
+              </a:rPr>
+              <a:t>–  </a:t>
+            </a:r>
+            <a:r>
               <a:rPr sz="1700" b="0" i="0">
                 <a:solidFill>
-                  <a:srgbClr val="222222"/>
-                </a:solidFill>
-                <a:latin typeface="Calibri"/>
-              </a:rPr>
-              <a:t>– выделить ключевые сущности: персонажей, события, улики;</a:t>
+                  <a:srgbClr val="1E2A24"/>
+                </a:solidFill>
+                <a:latin typeface="Calibri"/>
+              </a:rPr>
+              <a:t>выделить ключевые сущности: персонажей, события, улики;</a:t>
             </a:r>
           </a:p>
           <a:p>
@@ -3632,13 +4069,22 @@
               </a:spcAft>
             </a:pPr>
             <a:r>
+              <a:rPr sz="1700" b="1" i="0">
+                <a:solidFill>
+                  <a:srgbClr val="5B6B63"/>
+                </a:solidFill>
+                <a:latin typeface="Calibri"/>
+              </a:rPr>
+              <a:t>–  </a:t>
+            </a:r>
+            <a:r>
               <a:rPr sz="1700" b="0" i="0">
                 <a:solidFill>
-                  <a:srgbClr val="222222"/>
-                </a:solidFill>
-                <a:latin typeface="Calibri"/>
-              </a:rPr>
-              <a:t>– построить связи и обозначить их характер (прямые/косвенные);</a:t>
+                  <a:srgbClr val="1E2A24"/>
+                </a:solidFill>
+                <a:latin typeface="Calibri"/>
+              </a:rPr>
+              <a:t>построить связи и обозначить их характер (прямые / косвенные);</a:t>
             </a:r>
           </a:p>
           <a:p>
@@ -3648,13 +4094,22 @@
               </a:spcAft>
             </a:pPr>
             <a:r>
+              <a:rPr sz="1700" b="1" i="0">
+                <a:solidFill>
+                  <a:srgbClr val="5B6B63"/>
+                </a:solidFill>
+                <a:latin typeface="Calibri"/>
+              </a:rPr>
+              <a:t>–  </a:t>
+            </a:r>
+            <a:r>
               <a:rPr sz="1700" b="0" i="0">
                 <a:solidFill>
-                  <a:srgbClr val="222222"/>
-                </a:solidFill>
-                <a:latin typeface="Calibri"/>
-              </a:rPr>
-              <a:t>– проанализировать схему, выявить логику и пробелы;</a:t>
+                  <a:srgbClr val="1E2A24"/>
+                </a:solidFill>
+                <a:latin typeface="Calibri"/>
+              </a:rPr>
+              <a:t>проанализировать схему, выявить логику и пробелы;</a:t>
             </a:r>
           </a:p>
           <a:p>
@@ -3664,13 +4119,22 @@
               </a:spcAft>
             </a:pPr>
             <a:r>
+              <a:rPr sz="1700" b="1" i="0">
+                <a:solidFill>
+                  <a:srgbClr val="5B6B63"/>
+                </a:solidFill>
+                <a:latin typeface="Calibri"/>
+              </a:rPr>
+              <a:t>–  </a:t>
+            </a:r>
+            <a:r>
               <a:rPr sz="1700" b="0" i="0">
                 <a:solidFill>
-                  <a:srgbClr val="222222"/>
-                </a:solidFill>
-                <a:latin typeface="Calibri"/>
-              </a:rPr>
-              <a:t>– оформить отчёт и презентацию.</a:t>
+                  <a:srgbClr val="1E2A24"/>
+                </a:solidFill>
+                <a:latin typeface="Calibri"/>
+              </a:rPr>
+              <a:t>оформить отчёт и презентацию.</a:t>
             </a:r>
           </a:p>
           <a:p>
@@ -3680,27 +4144,80 @@
               </a:spcAft>
             </a:pPr>
             <a:r>
-              <a:rPr sz="1900" b="0" i="0">
-                <a:solidFill>
-                  <a:srgbClr val="555555"/>
-                </a:solidFill>
-                <a:latin typeface="Calibri"/>
-              </a:rPr>
-              <a:t>• Инструмент: IBM i2 Analyst's Notebook (link-анализ), импорт данных из CSV.</a:t>
-            </a:r>
-          </a:p>
-        </p:txBody>
-      </p:sp>
-      <p:sp>
-        <p:nvSpPr>
-          <p:cNvPr id="5" name="TextBox 4"/>
+              <a:rPr sz="1900" b="1" i="0">
+                <a:solidFill>
+                  <a:srgbClr val="5AA634"/>
+                </a:solidFill>
+                <a:latin typeface="Calibri"/>
+              </a:rPr>
+              <a:t>●  </a:t>
+            </a:r>
+            <a:r>
+              <a:rPr sz="1900" b="1" i="0">
+                <a:solidFill>
+                  <a:srgbClr val="B8860B"/>
+                </a:solidFill>
+                <a:latin typeface="Calibri"/>
+              </a:rPr>
+              <a:t>Инструмент: IBM i2 Analyst's Notebook — импорт данных из CSV (Import Design).</a:t>
+            </a:r>
+          </a:p>
+        </p:txBody>
+      </p:sp>
+      <p:sp>
+        <p:nvSpPr>
+          <p:cNvPr id="8" name="Rectangle 7"/>
+          <p:cNvSpPr/>
+          <p:nvPr/>
+        </p:nvSpPr>
+        <p:spPr>
+          <a:xfrm>
+            <a:off x="411480" y="6455664"/>
+            <a:ext cx="2926080" cy="27940"/>
+          </a:xfrm>
+          <a:prstGeom prst="rect">
+            <a:avLst/>
+          </a:prstGeom>
+          <a:solidFill>
+            <a:srgbClr val="5AA634"/>
+          </a:solidFill>
+          <a:ln>
+            <a:noFill/>
+          </a:ln>
+          <a:effectLst/>
+        </p:spPr>
+        <p:style>
+          <a:lnRef idx="1">
+            <a:schemeClr val="accent1"/>
+          </a:lnRef>
+          <a:fillRef idx="3">
+            <a:schemeClr val="accent1"/>
+          </a:fillRef>
+          <a:effectRef idx="2">
+            <a:schemeClr val="accent1"/>
+          </a:effectRef>
+          <a:fontRef idx="minor">
+            <a:schemeClr val="lt1"/>
+          </a:fontRef>
+        </p:style>
+        <p:txBody>
+          <a:bodyPr rtlCol="0" anchor="ctr"/>
+          <a:lstStyle/>
+          <a:p>
+            <a:pPr algn="ctr"/>
+          </a:p>
+        </p:txBody>
+      </p:sp>
+      <p:sp>
+        <p:nvSpPr>
+          <p:cNvPr id="9" name="TextBox 8"/>
           <p:cNvSpPr txBox="1"/>
           <p:nvPr/>
         </p:nvSpPr>
         <p:spPr>
           <a:xfrm>
-            <a:off x="10332720" y="6446520"/>
-            <a:ext cx="1737360" cy="365760"/>
+            <a:off x="9875520" y="6355080"/>
+            <a:ext cx="2194560" cy="365760"/>
           </a:xfrm>
           <a:prstGeom prst="rect">
             <a:avLst/>
@@ -3715,13 +4232,13 @@
           <a:p>
             <a:pPr algn="r"/>
             <a:r>
-              <a:rPr sz="1100" b="0" i="0">
-                <a:solidFill>
-                  <a:srgbClr val="555555"/>
-                </a:solidFill>
-                <a:latin typeface="Calibri"/>
-              </a:rPr>
-              <a:t>ЛР №9  •  2</a:t>
+              <a:rPr sz="1000" b="0" i="0">
+                <a:solidFill>
+                  <a:srgbClr val="5B6B63"/>
+                </a:solidFill>
+                <a:latin typeface="Calibri"/>
+              </a:rPr>
+              <a:t>Во все тяжкие · ЛР №9 · 2</a:t>
             </a:r>
           </a:p>
         </p:txBody>
@@ -3761,13 +4278,13 @@
         <p:spPr>
           <a:xfrm>
             <a:off x="0" y="0"/>
-            <a:ext cx="12191695" cy="1051560"/>
+            <a:ext cx="12191695" cy="1024128"/>
           </a:xfrm>
           <a:prstGeom prst="rect">
             <a:avLst/>
           </a:prstGeom>
           <a:solidFill>
-            <a:srgbClr val="1A3C5E"/>
+            <a:srgbClr val="14211A"/>
           </a:solidFill>
           <a:ln>
             <a:noFill/>
@@ -3798,14 +4315,106 @@
       </p:sp>
       <p:sp>
         <p:nvSpPr>
-          <p:cNvPr id="3" name="TextBox 2"/>
+          <p:cNvPr id="3" name="Rectangle 2"/>
+          <p:cNvSpPr/>
+          <p:nvPr/>
+        </p:nvSpPr>
+        <p:spPr>
+          <a:xfrm>
+            <a:off x="0" y="0"/>
+            <a:ext cx="164592" cy="1024128"/>
+          </a:xfrm>
+          <a:prstGeom prst="rect">
+            <a:avLst/>
+          </a:prstGeom>
+          <a:solidFill>
+            <a:srgbClr val="5AA634"/>
+          </a:solidFill>
+          <a:ln>
+            <a:noFill/>
+          </a:ln>
+          <a:effectLst/>
+        </p:spPr>
+        <p:style>
+          <a:lnRef idx="1">
+            <a:schemeClr val="accent1"/>
+          </a:lnRef>
+          <a:fillRef idx="3">
+            <a:schemeClr val="accent1"/>
+          </a:fillRef>
+          <a:effectRef idx="2">
+            <a:schemeClr val="accent1"/>
+          </a:effectRef>
+          <a:fontRef idx="minor">
+            <a:schemeClr val="lt1"/>
+          </a:fontRef>
+        </p:style>
+        <p:txBody>
+          <a:bodyPr rtlCol="0" anchor="ctr"/>
+          <a:lstStyle/>
+          <a:p>
+            <a:pPr algn="ctr"/>
+          </a:p>
+        </p:txBody>
+      </p:sp>
+      <p:pic>
+        <p:nvPicPr>
+          <p:cNvPr id="4" name="Picture 3" descr="tile_br.png"/>
+          <p:cNvPicPr>
+            <a:picLocks noChangeAspect="1"/>
+          </p:cNvPicPr>
+          <p:nvPr/>
+        </p:nvPicPr>
+        <p:blipFill>
+          <a:blip r:embed="rId2"/>
+          <a:stretch>
+            <a:fillRect/>
+          </a:stretch>
+        </p:blipFill>
+        <p:spPr>
+          <a:xfrm>
+            <a:off x="10927080" y="149448"/>
+            <a:ext cx="731520" cy="725231"/>
+          </a:xfrm>
+          <a:prstGeom prst="rect">
+            <a:avLst/>
+          </a:prstGeom>
+        </p:spPr>
+      </p:pic>
+      <p:pic>
+        <p:nvPicPr>
+          <p:cNvPr id="5" name="Picture 4" descr="tile_ba.png"/>
+          <p:cNvPicPr>
+            <a:picLocks noChangeAspect="1"/>
+          </p:cNvPicPr>
+          <p:nvPr/>
+        </p:nvPicPr>
+        <p:blipFill>
+          <a:blip r:embed="rId3"/>
+          <a:stretch>
+            <a:fillRect/>
+          </a:stretch>
+        </p:blipFill>
+        <p:spPr>
+          <a:xfrm>
+            <a:off x="11430000" y="149448"/>
+            <a:ext cx="731520" cy="725231"/>
+          </a:xfrm>
+          <a:prstGeom prst="rect">
+            <a:avLst/>
+          </a:prstGeom>
+        </p:spPr>
+      </p:pic>
+      <p:sp>
+        <p:nvSpPr>
+          <p:cNvPr id="6" name="TextBox 5"/>
           <p:cNvSpPr txBox="1"/>
           <p:nvPr/>
         </p:nvSpPr>
         <p:spPr>
           <a:xfrm>
-            <a:off x="457200" y="109728"/>
-            <a:ext cx="11247120" cy="868680"/>
+            <a:off x="411480" y="91440"/>
+            <a:ext cx="10241280" cy="868680"/>
           </a:xfrm>
           <a:prstGeom prst="rect">
             <a:avLst/>
@@ -3819,7 +4428,7 @@
           <a:lstStyle/>
           <a:p>
             <a:r>
-              <a:rPr sz="3000" b="1" i="0">
+              <a:rPr sz="2800" b="1" i="0">
                 <a:solidFill>
                   <a:srgbClr val="FFFFFF"/>
                 </a:solidFill>
@@ -3830,27 +4439,27 @@
           </a:p>
           <a:p>
             <a:r>
-              <a:rPr sz="1400" b="0" i="0">
-                <a:solidFill>
-                  <a:srgbClr val="CFDDEC"/>
-                </a:solidFill>
-                <a:latin typeface="Calibri"/>
-              </a:rPr>
-              <a:t>«Во все тяжкие» (Breaking Bad), AMC, 2008–2013, 5 сезонов</a:t>
-            </a:r>
-          </a:p>
-        </p:txBody>
-      </p:sp>
-      <p:sp>
-        <p:nvSpPr>
-          <p:cNvPr id="4" name="TextBox 3"/>
+              <a:rPr sz="1300" b="0" i="0">
+                <a:solidFill>
+                  <a:srgbClr val="C7D92D"/>
+                </a:solidFill>
+                <a:latin typeface="Calibri"/>
+              </a:rPr>
+              <a:t>«Во все тяжкие» (Breaking Bad) · AMC · 2008–2013 · 5 сезонов</a:t>
+            </a:r>
+          </a:p>
+        </p:txBody>
+      </p:sp>
+      <p:sp>
+        <p:nvSpPr>
+          <p:cNvPr id="7" name="TextBox 6"/>
           <p:cNvSpPr txBox="1"/>
           <p:nvPr/>
         </p:nvSpPr>
         <p:spPr>
           <a:xfrm>
-            <a:off x="640080" y="1600200"/>
-            <a:ext cx="10972800" cy="4937760"/>
+            <a:off x="548640" y="1417320"/>
+            <a:ext cx="7406640" cy="4754880"/>
           </a:xfrm>
           <a:prstGeom prst="rect">
             <a:avLst/>
@@ -3869,13 +4478,22 @@
               </a:spcAft>
             </a:pPr>
             <a:r>
-              <a:rPr sz="1900" b="0" i="0">
-                <a:solidFill>
-                  <a:srgbClr val="222222"/>
-                </a:solidFill>
-                <a:latin typeface="Calibri"/>
-              </a:rPr>
-              <a:t>• Уолтер Уайт — школьный учитель химии, узнаёт о смертельном диагнозе (рак лёгких).</a:t>
+              <a:rPr sz="1800" b="1" i="0">
+                <a:solidFill>
+                  <a:srgbClr val="5AA634"/>
+                </a:solidFill>
+                <a:latin typeface="Calibri"/>
+              </a:rPr>
+              <a:t>●  </a:t>
+            </a:r>
+            <a:r>
+              <a:rPr sz="1800" b="1" i="0">
+                <a:solidFill>
+                  <a:srgbClr val="1E2A24"/>
+                </a:solidFill>
+                <a:latin typeface="Calibri"/>
+              </a:rPr>
+              <a:t>Уолтер Уайт — школьный учитель химии, узнаёт о смертельном диагнозе.</a:t>
             </a:r>
           </a:p>
           <a:p>
@@ -3885,13 +4503,22 @@
               </a:spcAft>
             </a:pPr>
             <a:r>
-              <a:rPr sz="1900" b="0" i="0">
-                <a:solidFill>
-                  <a:srgbClr val="222222"/>
-                </a:solidFill>
-                <a:latin typeface="Calibri"/>
-              </a:rPr>
-              <a:t>• Чтобы обеспечить семью, он начинает подпольно производить метамфетамин вместе с бывшим учеником Джесси Пинкманом.</a:t>
+              <a:rPr sz="1800" b="1" i="0">
+                <a:solidFill>
+                  <a:srgbClr val="5AA634"/>
+                </a:solidFill>
+                <a:latin typeface="Calibri"/>
+              </a:rPr>
+              <a:t>●  </a:t>
+            </a:r>
+            <a:r>
+              <a:rPr sz="1800" b="0" i="0">
+                <a:solidFill>
+                  <a:srgbClr val="1E2A24"/>
+                </a:solidFill>
+                <a:latin typeface="Calibri"/>
+              </a:rPr>
+              <a:t>Чтобы обеспечить семью, начинает подпольно производить метамфетамин вместе с бывшим учеником Джесси Пинкманом.</a:t>
             </a:r>
           </a:p>
           <a:p>
@@ -3901,13 +4528,22 @@
               </a:spcAft>
             </a:pPr>
             <a:r>
-              <a:rPr sz="1900" b="0" i="0">
-                <a:solidFill>
-                  <a:srgbClr val="222222"/>
-                </a:solidFill>
-                <a:latin typeface="Calibri"/>
-              </a:rPr>
-              <a:t>• Под псевдонимом «Хайзенберг» Уолт превращается из жертвы обстоятельств в безжалостного главу наркоимперии.</a:t>
+              <a:rPr sz="1800" b="1" i="0">
+                <a:solidFill>
+                  <a:srgbClr val="5AA634"/>
+                </a:solidFill>
+                <a:latin typeface="Calibri"/>
+              </a:rPr>
+              <a:t>●  </a:t>
+            </a:r>
+            <a:r>
+              <a:rPr sz="1800" b="0" i="0">
+                <a:solidFill>
+                  <a:srgbClr val="1E2A24"/>
+                </a:solidFill>
+                <a:latin typeface="Calibri"/>
+              </a:rPr>
+              <a:t>Под псевдонимом «Хайзенберг» превращается из жертвы обстоятельств в главу наркоимперии.</a:t>
             </a:r>
           </a:p>
           <a:p>
@@ -3917,13 +4553,22 @@
               </a:spcAft>
             </a:pPr>
             <a:r>
-              <a:rPr sz="1900" b="0" i="0">
-                <a:solidFill>
-                  <a:srgbClr val="222222"/>
-                </a:solidFill>
-                <a:latin typeface="Calibri"/>
-              </a:rPr>
-              <a:t>• Жанр: криминальная драма. Центральная линия — производство и сбыт наркотиков и расследование DEA.</a:t>
+              <a:rPr sz="1800" b="1" i="0">
+                <a:solidFill>
+                  <a:srgbClr val="5AA634"/>
+                </a:solidFill>
+                <a:latin typeface="Calibri"/>
+              </a:rPr>
+              <a:t>●  </a:t>
+            </a:r>
+            <a:r>
+              <a:rPr sz="1800" b="0" i="0">
+                <a:solidFill>
+                  <a:srgbClr val="1E2A24"/>
+                </a:solidFill>
+                <a:latin typeface="Calibri"/>
+              </a:rPr>
+              <a:t>Жанр: криминальная драма; центральная линия — производство, сбыт и расследование DEA.</a:t>
             </a:r>
           </a:p>
           <a:p>
@@ -3933,27 +4578,174 @@
               </a:spcAft>
             </a:pPr>
             <a:r>
-              <a:rPr sz="1900" b="1" i="0">
-                <a:solidFill>
-                  <a:srgbClr val="2E7D32"/>
-                </a:solidFill>
-                <a:latin typeface="Calibri"/>
-              </a:rPr>
-              <a:t>• Почему удобно для схемы: множество персонажей, чёткая преступная сеть, узнаваемые улики и причинно-следственные связи.</a:t>
-            </a:r>
-          </a:p>
-        </p:txBody>
-      </p:sp>
-      <p:sp>
-        <p:nvSpPr>
-          <p:cNvPr id="5" name="TextBox 4"/>
+              <a:rPr sz="1800" b="1" i="0">
+                <a:solidFill>
+                  <a:srgbClr val="5AA634"/>
+                </a:solidFill>
+                <a:latin typeface="Calibri"/>
+              </a:rPr>
+              <a:t>●  </a:t>
+            </a:r>
+            <a:r>
+              <a:rPr sz="1800" b="1" i="0">
+                <a:solidFill>
+                  <a:srgbClr val="3E7A24"/>
+                </a:solidFill>
+                <a:latin typeface="Calibri"/>
+              </a:rPr>
+              <a:t>Удобно для схемы: большая преступная сеть, узнаваемые улики, чёткие причинно-следственные связи.</a:t>
+            </a:r>
+          </a:p>
+        </p:txBody>
+      </p:sp>
+      <p:sp>
+        <p:nvSpPr>
+          <p:cNvPr id="8" name="Rounded Rectangle 7"/>
+          <p:cNvSpPr/>
+          <p:nvPr/>
+        </p:nvSpPr>
+        <p:spPr>
+          <a:xfrm>
+            <a:off x="8229600" y="1463040"/>
+            <a:ext cx="3566160" cy="4480560"/>
+          </a:xfrm>
+          <a:prstGeom prst="roundRect">
+            <a:avLst/>
+          </a:prstGeom>
+          <a:solidFill>
+            <a:srgbClr val="F1F5F0"/>
+          </a:solidFill>
+          <a:ln w="20320">
+            <a:solidFill>
+              <a:srgbClr val="5AA634"/>
+            </a:solidFill>
+            <a:prstDash val="dash"/>
+          </a:ln>
+          <a:effectLst/>
+        </p:spPr>
+        <p:style>
+          <a:lnRef idx="1">
+            <a:schemeClr val="accent1"/>
+          </a:lnRef>
+          <a:fillRef idx="3">
+            <a:schemeClr val="accent1"/>
+          </a:fillRef>
+          <a:effectRef idx="2">
+            <a:schemeClr val="accent1"/>
+          </a:effectRef>
+          <a:fontRef idx="minor">
+            <a:schemeClr val="lt1"/>
+          </a:fontRef>
+        </p:style>
+        <p:txBody>
+          <a:bodyPr rtlCol="0" anchor="ctr"/>
+          <a:lstStyle/>
+          <a:p>
+            <a:pPr algn="ctr"/>
+          </a:p>
+        </p:txBody>
+      </p:sp>
+      <p:sp>
+        <p:nvSpPr>
+          <p:cNvPr id="9" name="TextBox 8"/>
           <p:cNvSpPr txBox="1"/>
           <p:nvPr/>
         </p:nvSpPr>
         <p:spPr>
           <a:xfrm>
-            <a:off x="10332720" y="6446520"/>
-            <a:ext cx="1737360" cy="365760"/>
+            <a:off x="8229600" y="1463040"/>
+            <a:ext cx="3566160" cy="4480560"/>
+          </a:xfrm>
+          <a:prstGeom prst="rect">
+            <a:avLst/>
+          </a:prstGeom>
+          <a:noFill/>
+        </p:spPr>
+        <p:txBody>
+          <a:bodyPr wrap="square" anchor="ctr">
+            <a:spAutoFit/>
+          </a:bodyPr>
+          <a:lstStyle/>
+          <a:p>
+            <a:pPr algn="ctr"/>
+            <a:r>
+              <a:rPr sz="1300" b="1" i="0">
+                <a:solidFill>
+                  <a:srgbClr val="5AA634"/>
+                </a:solidFill>
+                <a:latin typeface="Calibri"/>
+              </a:rPr>
+              <a:t>Кадр из сериала</a:t>
+            </a:r>
+          </a:p>
+          <a:p>
+            <a:pPr algn="ctr"/>
+            <a:r>
+              <a:rPr sz="1300" b="0" i="0">
+                <a:solidFill>
+                  <a:srgbClr val="5AA634"/>
+                </a:solidFill>
+                <a:latin typeface="Calibri"/>
+              </a:rPr>
+              <a:t>(вставьте фото)</a:t>
+            </a:r>
+          </a:p>
+        </p:txBody>
+      </p:sp>
+      <p:sp>
+        <p:nvSpPr>
+          <p:cNvPr id="10" name="Rectangle 9"/>
+          <p:cNvSpPr/>
+          <p:nvPr/>
+        </p:nvSpPr>
+        <p:spPr>
+          <a:xfrm>
+            <a:off x="411480" y="6455664"/>
+            <a:ext cx="2926080" cy="27940"/>
+          </a:xfrm>
+          <a:prstGeom prst="rect">
+            <a:avLst/>
+          </a:prstGeom>
+          <a:solidFill>
+            <a:srgbClr val="5AA634"/>
+          </a:solidFill>
+          <a:ln>
+            <a:noFill/>
+          </a:ln>
+          <a:effectLst/>
+        </p:spPr>
+        <p:style>
+          <a:lnRef idx="1">
+            <a:schemeClr val="accent1"/>
+          </a:lnRef>
+          <a:fillRef idx="3">
+            <a:schemeClr val="accent1"/>
+          </a:fillRef>
+          <a:effectRef idx="2">
+            <a:schemeClr val="accent1"/>
+          </a:effectRef>
+          <a:fontRef idx="minor">
+            <a:schemeClr val="lt1"/>
+          </a:fontRef>
+        </p:style>
+        <p:txBody>
+          <a:bodyPr rtlCol="0" anchor="ctr"/>
+          <a:lstStyle/>
+          <a:p>
+            <a:pPr algn="ctr"/>
+          </a:p>
+        </p:txBody>
+      </p:sp>
+      <p:sp>
+        <p:nvSpPr>
+          <p:cNvPr id="11" name="TextBox 10"/>
+          <p:cNvSpPr txBox="1"/>
+          <p:nvPr/>
+        </p:nvSpPr>
+        <p:spPr>
+          <a:xfrm>
+            <a:off x="9875520" y="6355080"/>
+            <a:ext cx="2194560" cy="365760"/>
           </a:xfrm>
           <a:prstGeom prst="rect">
             <a:avLst/>
@@ -3968,13 +4760,13 @@
           <a:p>
             <a:pPr algn="r"/>
             <a:r>
-              <a:rPr sz="1100" b="0" i="0">
-                <a:solidFill>
-                  <a:srgbClr val="555555"/>
-                </a:solidFill>
-                <a:latin typeface="Calibri"/>
-              </a:rPr>
-              <a:t>ЛР №9  •  3</a:t>
+              <a:rPr sz="1000" b="0" i="0">
+                <a:solidFill>
+                  <a:srgbClr val="5B6B63"/>
+                </a:solidFill>
+                <a:latin typeface="Calibri"/>
+              </a:rPr>
+              <a:t>Во все тяжкие · ЛР №9 · 3</a:t>
             </a:r>
           </a:p>
         </p:txBody>
@@ -4014,13 +4806,13 @@
         <p:spPr>
           <a:xfrm>
             <a:off x="0" y="0"/>
-            <a:ext cx="12191695" cy="1051560"/>
+            <a:ext cx="12191695" cy="1024128"/>
           </a:xfrm>
           <a:prstGeom prst="rect">
             <a:avLst/>
           </a:prstGeom>
           <a:solidFill>
-            <a:srgbClr val="1A3C5E"/>
+            <a:srgbClr val="14211A"/>
           </a:solidFill>
           <a:ln>
             <a:noFill/>
@@ -4051,59 +4843,23 @@
       </p:sp>
       <p:sp>
         <p:nvSpPr>
-          <p:cNvPr id="3" name="TextBox 2"/>
-          <p:cNvSpPr txBox="1"/>
-          <p:nvPr/>
-        </p:nvSpPr>
-        <p:spPr>
-          <a:xfrm>
-            <a:off x="457200" y="109728"/>
-            <a:ext cx="11247120" cy="868680"/>
-          </a:xfrm>
-          <a:prstGeom prst="rect">
-            <a:avLst/>
-          </a:prstGeom>
-          <a:noFill/>
-        </p:spPr>
-        <p:txBody>
-          <a:bodyPr wrap="square" anchor="ctr">
-            <a:spAutoFit/>
-          </a:bodyPr>
-          <a:lstStyle/>
-          <a:p>
-            <a:r>
-              <a:rPr sz="3000" b="1" i="0">
-                <a:solidFill>
-                  <a:srgbClr val="FFFFFF"/>
-                </a:solidFill>
-                <a:latin typeface="Calibri"/>
-              </a:rPr>
-              <a:t>Методология: ключевые сущности</a:t>
-            </a:r>
-          </a:p>
-        </p:txBody>
-      </p:sp>
-      <p:sp>
-        <p:nvSpPr>
-          <p:cNvPr id="4" name="Rectangle 3"/>
+          <p:cNvPr id="3" name="Rectangle 2"/>
           <p:cNvSpPr/>
           <p:nvPr/>
         </p:nvSpPr>
         <p:spPr>
           <a:xfrm>
-            <a:off x="502920" y="1463040"/>
-            <a:ext cx="3657600" cy="548640"/>
+            <a:off x="0" y="0"/>
+            <a:ext cx="164592" cy="1024128"/>
           </a:xfrm>
           <a:prstGeom prst="rect">
             <a:avLst/>
           </a:prstGeom>
           <a:solidFill>
-            <a:srgbClr val="BBD7F2"/>
+            <a:srgbClr val="5AA634"/>
           </a:solidFill>
           <a:ln>
-            <a:solidFill>
-              <a:srgbClr val="555555"/>
-            </a:solidFill>
+            <a:noFill/>
           </a:ln>
           <a:effectLst/>
         </p:spPr>
@@ -4122,42 +4878,115 @@
           </a:fontRef>
         </p:style>
         <p:txBody>
-          <a:bodyPr rtlCol="0" anchor="ctr" wrap="square"/>
+          <a:bodyPr rtlCol="0" anchor="ctr"/>
           <a:lstStyle/>
           <a:p>
             <a:pPr algn="ctr"/>
-            <a:r>
-              <a:rPr sz="1600" b="1" i="0">
-                <a:solidFill>
-                  <a:srgbClr val="222222"/>
-                </a:solidFill>
-                <a:latin typeface="Calibri"/>
-              </a:rPr>
-              <a:t>ПЕРСОНАЖИ</a:t>
-            </a:r>
-          </a:p>
-        </p:txBody>
-      </p:sp>
-      <p:sp>
-        <p:nvSpPr>
-          <p:cNvPr id="5" name="Rectangle 4"/>
+          </a:p>
+        </p:txBody>
+      </p:sp>
+      <p:pic>
+        <p:nvPicPr>
+          <p:cNvPr id="4" name="Picture 3" descr="tile_br.png"/>
+          <p:cNvPicPr>
+            <a:picLocks noChangeAspect="1"/>
+          </p:cNvPicPr>
+          <p:nvPr/>
+        </p:nvPicPr>
+        <p:blipFill>
+          <a:blip r:embed="rId2"/>
+          <a:stretch>
+            <a:fillRect/>
+          </a:stretch>
+        </p:blipFill>
+        <p:spPr>
+          <a:xfrm>
+            <a:off x="10927080" y="149448"/>
+            <a:ext cx="731520" cy="725231"/>
+          </a:xfrm>
+          <a:prstGeom prst="rect">
+            <a:avLst/>
+          </a:prstGeom>
+        </p:spPr>
+      </p:pic>
+      <p:pic>
+        <p:nvPicPr>
+          <p:cNvPr id="5" name="Picture 4" descr="tile_ba.png"/>
+          <p:cNvPicPr>
+            <a:picLocks noChangeAspect="1"/>
+          </p:cNvPicPr>
+          <p:nvPr/>
+        </p:nvPicPr>
+        <p:blipFill>
+          <a:blip r:embed="rId3"/>
+          <a:stretch>
+            <a:fillRect/>
+          </a:stretch>
+        </p:blipFill>
+        <p:spPr>
+          <a:xfrm>
+            <a:off x="11430000" y="149448"/>
+            <a:ext cx="731520" cy="725231"/>
+          </a:xfrm>
+          <a:prstGeom prst="rect">
+            <a:avLst/>
+          </a:prstGeom>
+        </p:spPr>
+      </p:pic>
+      <p:sp>
+        <p:nvSpPr>
+          <p:cNvPr id="6" name="TextBox 5"/>
+          <p:cNvSpPr txBox="1"/>
+          <p:nvPr/>
+        </p:nvSpPr>
+        <p:spPr>
+          <a:xfrm>
+            <a:off x="411480" y="91440"/>
+            <a:ext cx="10241280" cy="868680"/>
+          </a:xfrm>
+          <a:prstGeom prst="rect">
+            <a:avLst/>
+          </a:prstGeom>
+          <a:noFill/>
+        </p:spPr>
+        <p:txBody>
+          <a:bodyPr wrap="square" anchor="ctr">
+            <a:spAutoFit/>
+          </a:bodyPr>
+          <a:lstStyle/>
+          <a:p>
+            <a:r>
+              <a:rPr sz="2800" b="1" i="0">
+                <a:solidFill>
+                  <a:srgbClr val="FFFFFF"/>
+                </a:solidFill>
+                <a:latin typeface="Calibri"/>
+              </a:rPr>
+              <a:t>Действующие лица</a:t>
+            </a:r>
+          </a:p>
+        </p:txBody>
+      </p:sp>
+      <p:sp>
+        <p:nvSpPr>
+          <p:cNvPr id="7" name="Rounded Rectangle 6"/>
           <p:cNvSpPr/>
           <p:nvPr/>
         </p:nvSpPr>
         <p:spPr>
           <a:xfrm>
-            <a:off x="502920" y="2011680"/>
-            <a:ext cx="3657600" cy="4297680"/>
-          </a:xfrm>
-          <a:prstGeom prst="rect">
+            <a:off x="502920" y="1325880"/>
+            <a:ext cx="2670048" cy="2331720"/>
+          </a:xfrm>
+          <a:prstGeom prst="roundRect">
             <a:avLst/>
           </a:prstGeom>
           <a:solidFill>
-            <a:srgbClr val="F2F4F7"/>
+            <a:srgbClr val="F1F5F0"/>
           </a:solidFill>
-          <a:ln>
+          <a:ln w="15240">
             <a:solidFill>
-              <a:srgbClr val="555555"/>
+              <a:srgbClr val="DDE5DC"/>
             </a:solidFill>
           </a:ln>
           <a:effectLst/>
@@ -4177,127 +5006,32 @@
           </a:fontRef>
         </p:style>
         <p:txBody>
-          <a:bodyPr rtlCol="0" anchor="ctr" wrap="square" lIns="164592" tIns="137160"/>
-          <a:lstStyle/>
-          <a:p>
-            <a:pPr algn="ctr">
-              <a:spcAft>
-                <a:spcPts val="800"/>
-              </a:spcAft>
-            </a:pPr>
-            <a:r>
-              <a:rPr sz="1400" b="0" i="0">
-                <a:solidFill>
-                  <a:srgbClr val="222222"/>
-                </a:solidFill>
-                <a:latin typeface="Calibri"/>
-              </a:rPr>
-              <a:t>• Уолт «Хайзенберг» — организатор</a:t>
-            </a:r>
-          </a:p>
-          <a:p>
-            <a:pPr>
-              <a:spcAft>
-                <a:spcPts val="800"/>
-              </a:spcAft>
-            </a:pPr>
-            <a:r>
-              <a:rPr sz="1400" b="0" i="0">
-                <a:solidFill>
-                  <a:srgbClr val="222222"/>
-                </a:solidFill>
-                <a:latin typeface="Calibri"/>
-              </a:rPr>
-              <a:t>• Джесси Пинкман — сообщник</a:t>
-            </a:r>
-          </a:p>
-          <a:p>
-            <a:pPr>
-              <a:spcAft>
-                <a:spcPts val="800"/>
-              </a:spcAft>
-            </a:pPr>
-            <a:r>
-              <a:rPr sz="1400" b="0" i="0">
-                <a:solidFill>
-                  <a:srgbClr val="222222"/>
-                </a:solidFill>
-                <a:latin typeface="Calibri"/>
-              </a:rPr>
-              <a:t>• Густаво Фринг — дистрибьютор</a:t>
-            </a:r>
-          </a:p>
-          <a:p>
-            <a:pPr>
-              <a:spcAft>
-                <a:spcPts val="800"/>
-              </a:spcAft>
-            </a:pPr>
-            <a:r>
-              <a:rPr sz="1400" b="0" i="0">
-                <a:solidFill>
-                  <a:srgbClr val="222222"/>
-                </a:solidFill>
-                <a:latin typeface="Calibri"/>
-              </a:rPr>
-              <a:t>• Майк, Сол, Лидия — инфраструктура</a:t>
-            </a:r>
-          </a:p>
-          <a:p>
-            <a:pPr>
-              <a:spcAft>
-                <a:spcPts val="800"/>
-              </a:spcAft>
-            </a:pPr>
-            <a:r>
-              <a:rPr sz="1400" b="0" i="0">
-                <a:solidFill>
-                  <a:srgbClr val="222222"/>
-                </a:solidFill>
-                <a:latin typeface="Calibri"/>
-              </a:rPr>
-              <a:t>• Хэнк (DEA) — детектив</a:t>
-            </a:r>
-          </a:p>
-          <a:p>
-            <a:pPr>
-              <a:spcAft>
-                <a:spcPts val="800"/>
-              </a:spcAft>
-            </a:pPr>
-            <a:r>
-              <a:rPr sz="1400" b="0" i="0">
-                <a:solidFill>
-                  <a:srgbClr val="222222"/>
-                </a:solidFill>
-                <a:latin typeface="Calibri"/>
-              </a:rPr>
-              <a:t>• Гейл, Брок — жертвы</a:t>
-            </a:r>
-          </a:p>
-        </p:txBody>
-      </p:sp>
-      <p:sp>
-        <p:nvSpPr>
-          <p:cNvPr id="6" name="Rectangle 5"/>
+          <a:bodyPr rtlCol="0" anchor="ctr"/>
+          <a:lstStyle/>
+          <a:p>
+            <a:pPr algn="ctr"/>
+          </a:p>
+        </p:txBody>
+      </p:sp>
+      <p:sp>
+        <p:nvSpPr>
+          <p:cNvPr id="8" name="Rectangle 7"/>
           <p:cNvSpPr/>
           <p:nvPr/>
         </p:nvSpPr>
         <p:spPr>
           <a:xfrm>
-            <a:off x="4407408" y="1463040"/>
-            <a:ext cx="3657600" cy="548640"/>
+            <a:off x="502920" y="1325880"/>
+            <a:ext cx="2670048" cy="109728"/>
           </a:xfrm>
           <a:prstGeom prst="rect">
             <a:avLst/>
           </a:prstGeom>
           <a:solidFill>
-            <a:srgbClr val="F8B5B0"/>
+            <a:srgbClr val="3E7A24"/>
           </a:solidFill>
           <a:ln>
-            <a:solidFill>
-              <a:srgbClr val="555555"/>
-            </a:solidFill>
+            <a:noFill/>
           </a:ln>
           <a:effectLst/>
         </p:spPr>
@@ -4316,42 +5050,104 @@
           </a:fontRef>
         </p:style>
         <p:txBody>
-          <a:bodyPr rtlCol="0" anchor="ctr" wrap="square"/>
+          <a:bodyPr rtlCol="0" anchor="ctr"/>
           <a:lstStyle/>
           <a:p>
             <a:pPr algn="ctr"/>
-            <a:r>
-              <a:rPr sz="1600" b="1" i="0">
-                <a:solidFill>
-                  <a:srgbClr val="222222"/>
-                </a:solidFill>
-                <a:latin typeface="Calibri"/>
-              </a:rPr>
-              <a:t>СОБЫТИЯ</a:t>
-            </a:r>
-          </a:p>
-        </p:txBody>
-      </p:sp>
-      <p:sp>
-        <p:nvSpPr>
-          <p:cNvPr id="7" name="Rectangle 6"/>
+          </a:p>
+        </p:txBody>
+      </p:sp>
+      <p:pic>
+        <p:nvPicPr>
+          <p:cNvPr id="9" name="Picture 8" descr="av_walt.png"/>
+          <p:cNvPicPr>
+            <a:picLocks noChangeAspect="1"/>
+          </p:cNvPicPr>
+          <p:nvPr/>
+        </p:nvPicPr>
+        <p:blipFill>
+          <a:blip r:embed="rId4"/>
+          <a:stretch>
+            <a:fillRect/>
+          </a:stretch>
+        </p:blipFill>
+        <p:spPr>
+          <a:xfrm>
+            <a:off x="1220724" y="1527048"/>
+            <a:ext cx="1234440" cy="1234440"/>
+          </a:xfrm>
+          <a:prstGeom prst="rect">
+            <a:avLst/>
+          </a:prstGeom>
+        </p:spPr>
+      </p:pic>
+      <p:sp>
+        <p:nvSpPr>
+          <p:cNvPr id="10" name="TextBox 9"/>
+          <p:cNvSpPr txBox="1"/>
+          <p:nvPr/>
+        </p:nvSpPr>
+        <p:spPr>
+          <a:xfrm>
+            <a:off x="594360" y="2807208"/>
+            <a:ext cx="2487168" cy="822960"/>
+          </a:xfrm>
+          <a:prstGeom prst="rect">
+            <a:avLst/>
+          </a:prstGeom>
+          <a:noFill/>
+        </p:spPr>
+        <p:txBody>
+          <a:bodyPr wrap="square">
+            <a:spAutoFit/>
+          </a:bodyPr>
+          <a:lstStyle/>
+          <a:p>
+            <a:pPr algn="ctr"/>
+            <a:r>
+              <a:rPr sz="1500" b="1" i="0">
+                <a:solidFill>
+                  <a:srgbClr val="1E2A24"/>
+                </a:solidFill>
+                <a:latin typeface="Calibri"/>
+              </a:rPr>
+              <a:t>Уолтер Уайт</a:t>
+            </a:r>
+          </a:p>
+          <a:p>
+            <a:pPr algn="ctr"/>
+            <a:r>
+              <a:rPr sz="1200" b="0" i="0">
+                <a:solidFill>
+                  <a:srgbClr val="5B6B63"/>
+                </a:solidFill>
+                <a:latin typeface="Calibri"/>
+              </a:rPr>
+              <a:t>«Хайзенберг» — организатор</a:t>
+            </a:r>
+          </a:p>
+        </p:txBody>
+      </p:sp>
+      <p:sp>
+        <p:nvSpPr>
+          <p:cNvPr id="11" name="Rounded Rectangle 10"/>
           <p:cNvSpPr/>
           <p:nvPr/>
         </p:nvSpPr>
         <p:spPr>
           <a:xfrm>
-            <a:off x="4407408" y="2011680"/>
-            <a:ext cx="3657600" cy="4297680"/>
-          </a:xfrm>
-          <a:prstGeom prst="rect">
+            <a:off x="3374136" y="1325880"/>
+            <a:ext cx="2670048" cy="2331720"/>
+          </a:xfrm>
+          <a:prstGeom prst="roundRect">
             <a:avLst/>
           </a:prstGeom>
           <a:solidFill>
-            <a:srgbClr val="F2F4F7"/>
+            <a:srgbClr val="F1F5F0"/>
           </a:solidFill>
-          <a:ln>
+          <a:ln w="15240">
             <a:solidFill>
-              <a:srgbClr val="555555"/>
+              <a:srgbClr val="DDE5DC"/>
             </a:solidFill>
           </a:ln>
           <a:effectLst/>
@@ -4371,111 +5167,32 @@
           </a:fontRef>
         </p:style>
         <p:txBody>
-          <a:bodyPr rtlCol="0" anchor="ctr" wrap="square" lIns="164592" tIns="137160"/>
-          <a:lstStyle/>
-          <a:p>
-            <a:pPr algn="ctr">
-              <a:spcAft>
-                <a:spcPts val="800"/>
-              </a:spcAft>
-            </a:pPr>
-            <a:r>
-              <a:rPr sz="1400" b="0" i="0">
-                <a:solidFill>
-                  <a:srgbClr val="222222"/>
-                </a:solidFill>
-                <a:latin typeface="Calibri"/>
-              </a:rPr>
-              <a:t>• Производство «голубого мета»</a:t>
-            </a:r>
-          </a:p>
-          <a:p>
-            <a:pPr>
-              <a:spcAft>
-                <a:spcPts val="800"/>
-              </a:spcAft>
-            </a:pPr>
-            <a:r>
-              <a:rPr sz="1400" b="0" i="0">
-                <a:solidFill>
-                  <a:srgbClr val="222222"/>
-                </a:solidFill>
-                <a:latin typeface="Calibri"/>
-              </a:rPr>
-              <a:t>• Убийство Гейла</a:t>
-            </a:r>
-          </a:p>
-          <a:p>
-            <a:pPr>
-              <a:spcAft>
-                <a:spcPts val="800"/>
-              </a:spcAft>
-            </a:pPr>
-            <a:r>
-              <a:rPr sz="1400" b="0" i="0">
-                <a:solidFill>
-                  <a:srgbClr val="222222"/>
-                </a:solidFill>
-                <a:latin typeface="Calibri"/>
-              </a:rPr>
-              <a:t>• Отравление Брока (рицин)</a:t>
-            </a:r>
-          </a:p>
-          <a:p>
-            <a:pPr>
-              <a:spcAft>
-                <a:spcPts val="800"/>
-              </a:spcAft>
-            </a:pPr>
-            <a:r>
-              <a:rPr sz="1400" b="0" i="0">
-                <a:solidFill>
-                  <a:srgbClr val="222222"/>
-                </a:solidFill>
-                <a:latin typeface="Calibri"/>
-              </a:rPr>
-              <a:t>• Взрыв — гибель Гуса</a:t>
-            </a:r>
-          </a:p>
-          <a:p>
-            <a:pPr>
-              <a:spcAft>
-                <a:spcPts val="800"/>
-              </a:spcAft>
-            </a:pPr>
-            <a:r>
-              <a:rPr sz="1400" b="0" i="0">
-                <a:solidFill>
-                  <a:srgbClr val="222222"/>
-                </a:solidFill>
-                <a:latin typeface="Calibri"/>
-              </a:rPr>
-              <a:t>• Гибель Хэнка</a:t>
-            </a:r>
-          </a:p>
-        </p:txBody>
-      </p:sp>
-      <p:sp>
-        <p:nvSpPr>
-          <p:cNvPr id="8" name="Rectangle 7"/>
+          <a:bodyPr rtlCol="0" anchor="ctr"/>
+          <a:lstStyle/>
+          <a:p>
+            <a:pPr algn="ctr"/>
+          </a:p>
+        </p:txBody>
+      </p:sp>
+      <p:sp>
+        <p:nvSpPr>
+          <p:cNvPr id="12" name="Rectangle 11"/>
           <p:cNvSpPr/>
           <p:nvPr/>
         </p:nvSpPr>
         <p:spPr>
           <a:xfrm>
-            <a:off x="8311896" y="1463040"/>
-            <a:ext cx="3657600" cy="548640"/>
+            <a:off x="3374136" y="1325880"/>
+            <a:ext cx="2670048" cy="109728"/>
           </a:xfrm>
           <a:prstGeom prst="rect">
             <a:avLst/>
           </a:prstGeom>
           <a:solidFill>
-            <a:srgbClr val="BFE3B6"/>
+            <a:srgbClr val="2C6E9E"/>
           </a:solidFill>
           <a:ln>
-            <a:solidFill>
-              <a:srgbClr val="555555"/>
-            </a:solidFill>
+            <a:noFill/>
           </a:ln>
           <a:effectLst/>
         </p:spPr>
@@ -4494,42 +5211,104 @@
           </a:fontRef>
         </p:style>
         <p:txBody>
-          <a:bodyPr rtlCol="0" anchor="ctr" wrap="square"/>
+          <a:bodyPr rtlCol="0" anchor="ctr"/>
           <a:lstStyle/>
           <a:p>
             <a:pPr algn="ctr"/>
-            <a:r>
-              <a:rPr sz="1600" b="1" i="0">
-                <a:solidFill>
-                  <a:srgbClr val="222222"/>
-                </a:solidFill>
-                <a:latin typeface="Calibri"/>
-              </a:rPr>
-              <a:t>ДОКАЗАТЕЛЬСТВА</a:t>
-            </a:r>
-          </a:p>
-        </p:txBody>
-      </p:sp>
-      <p:sp>
-        <p:nvSpPr>
-          <p:cNvPr id="9" name="Rectangle 8"/>
+          </a:p>
+        </p:txBody>
+      </p:sp>
+      <p:pic>
+        <p:nvPicPr>
+          <p:cNvPr id="13" name="Picture 12" descr="av_jesse.png"/>
+          <p:cNvPicPr>
+            <a:picLocks noChangeAspect="1"/>
+          </p:cNvPicPr>
+          <p:nvPr/>
+        </p:nvPicPr>
+        <p:blipFill>
+          <a:blip r:embed="rId5"/>
+          <a:stretch>
+            <a:fillRect/>
+          </a:stretch>
+        </p:blipFill>
+        <p:spPr>
+          <a:xfrm>
+            <a:off x="4091940" y="1527048"/>
+            <a:ext cx="1234440" cy="1234440"/>
+          </a:xfrm>
+          <a:prstGeom prst="rect">
+            <a:avLst/>
+          </a:prstGeom>
+        </p:spPr>
+      </p:pic>
+      <p:sp>
+        <p:nvSpPr>
+          <p:cNvPr id="14" name="TextBox 13"/>
+          <p:cNvSpPr txBox="1"/>
+          <p:nvPr/>
+        </p:nvSpPr>
+        <p:spPr>
+          <a:xfrm>
+            <a:off x="3465576" y="2807208"/>
+            <a:ext cx="2487168" cy="822960"/>
+          </a:xfrm>
+          <a:prstGeom prst="rect">
+            <a:avLst/>
+          </a:prstGeom>
+          <a:noFill/>
+        </p:spPr>
+        <p:txBody>
+          <a:bodyPr wrap="square">
+            <a:spAutoFit/>
+          </a:bodyPr>
+          <a:lstStyle/>
+          <a:p>
+            <a:pPr algn="ctr"/>
+            <a:r>
+              <a:rPr sz="1500" b="1" i="0">
+                <a:solidFill>
+                  <a:srgbClr val="1E2A24"/>
+                </a:solidFill>
+                <a:latin typeface="Calibri"/>
+              </a:rPr>
+              <a:t>Джесси Пинкман</a:t>
+            </a:r>
+          </a:p>
+          <a:p>
+            <a:pPr algn="ctr"/>
+            <a:r>
+              <a:rPr sz="1200" b="0" i="0">
+                <a:solidFill>
+                  <a:srgbClr val="5B6B63"/>
+                </a:solidFill>
+                <a:latin typeface="Calibri"/>
+              </a:rPr>
+              <a:t>сообщник, «повар»</a:t>
+            </a:r>
+          </a:p>
+        </p:txBody>
+      </p:sp>
+      <p:sp>
+        <p:nvSpPr>
+          <p:cNvPr id="15" name="Rounded Rectangle 14"/>
           <p:cNvSpPr/>
           <p:nvPr/>
         </p:nvSpPr>
         <p:spPr>
           <a:xfrm>
-            <a:off x="8311896" y="2011680"/>
-            <a:ext cx="3657600" cy="4297680"/>
-          </a:xfrm>
-          <a:prstGeom prst="rect">
+            <a:off x="6245352" y="1325880"/>
+            <a:ext cx="2670048" cy="2331720"/>
+          </a:xfrm>
+          <a:prstGeom prst="roundRect">
             <a:avLst/>
           </a:prstGeom>
           <a:solidFill>
-            <a:srgbClr val="F2F4F7"/>
+            <a:srgbClr val="F1F5F0"/>
           </a:solidFill>
-          <a:ln>
+          <a:ln w="15240">
             <a:solidFill>
-              <a:srgbClr val="555555"/>
+              <a:srgbClr val="DDE5DC"/>
             </a:solidFill>
           </a:ln>
           <a:effectLst/>
@@ -4549,116 +5328,91 @@
           </a:fontRef>
         </p:style>
         <p:txBody>
-          <a:bodyPr rtlCol="0" anchor="ctr" wrap="square" lIns="164592" tIns="137160"/>
-          <a:lstStyle/>
-          <a:p>
-            <a:pPr algn="ctr">
-              <a:spcAft>
-                <a:spcPts val="800"/>
-              </a:spcAft>
-            </a:pPr>
-            <a:r>
-              <a:rPr sz="1400" b="0" i="0">
-                <a:solidFill>
-                  <a:srgbClr val="222222"/>
-                </a:solidFill>
-                <a:latin typeface="Calibri"/>
-              </a:rPr>
-              <a:t>• Голубой метамфетамин</a:t>
-            </a:r>
-          </a:p>
-          <a:p>
-            <a:pPr>
-              <a:spcAft>
-                <a:spcPts val="800"/>
-              </a:spcAft>
-            </a:pPr>
-            <a:r>
-              <a:rPr sz="1400" b="0" i="0">
-                <a:solidFill>
-                  <a:srgbClr val="222222"/>
-                </a:solidFill>
-                <a:latin typeface="Calibri"/>
-              </a:rPr>
-              <a:t>• Книга «Leaves of Grass» («G.B.»)</a:t>
-            </a:r>
-          </a:p>
-          <a:p>
-            <a:pPr>
-              <a:spcAft>
-                <a:spcPts val="800"/>
-              </a:spcAft>
-            </a:pPr>
-            <a:r>
-              <a:rPr sz="1400" b="0" i="0">
-                <a:solidFill>
-                  <a:srgbClr val="222222"/>
-                </a:solidFill>
-                <a:latin typeface="Calibri"/>
-              </a:rPr>
-              <a:t>• Рицин (яд)</a:t>
-            </a:r>
-          </a:p>
-          <a:p>
-            <a:pPr>
-              <a:spcAft>
-                <a:spcPts val="800"/>
-              </a:spcAft>
-            </a:pPr>
-            <a:r>
-              <a:rPr sz="1400" b="0" i="0">
-                <a:solidFill>
-                  <a:srgbClr val="222222"/>
-                </a:solidFill>
-                <a:latin typeface="Calibri"/>
-              </a:rPr>
-              <a:t>• Суперлаборатория / RV</a:t>
-            </a:r>
-          </a:p>
-          <a:p>
-            <a:pPr>
-              <a:spcAft>
-                <a:spcPts val="800"/>
-              </a:spcAft>
-            </a:pPr>
-            <a:r>
-              <a:rPr sz="1400" b="0" i="0">
-                <a:solidFill>
-                  <a:srgbClr val="222222"/>
-                </a:solidFill>
-                <a:latin typeface="Calibri"/>
-              </a:rPr>
-              <a:t>• Метиламин (сырьё)</a:t>
-            </a:r>
-          </a:p>
-          <a:p>
-            <a:pPr>
-              <a:spcAft>
-                <a:spcPts val="800"/>
-              </a:spcAft>
-            </a:pPr>
-            <a:r>
-              <a:rPr sz="1400" b="0" i="0">
-                <a:solidFill>
-                  <a:srgbClr val="222222"/>
-                </a:solidFill>
-                <a:latin typeface="Calibri"/>
-              </a:rPr>
-              <a:t>• Деньги / автомойка A1</a:t>
-            </a:r>
-          </a:p>
-        </p:txBody>
-      </p:sp>
-      <p:sp>
-        <p:nvSpPr>
-          <p:cNvPr id="10" name="TextBox 9"/>
+          <a:bodyPr rtlCol="0" anchor="ctr"/>
+          <a:lstStyle/>
+          <a:p>
+            <a:pPr algn="ctr"/>
+          </a:p>
+        </p:txBody>
+      </p:sp>
+      <p:sp>
+        <p:nvSpPr>
+          <p:cNvPr id="16" name="Rectangle 15"/>
+          <p:cNvSpPr/>
+          <p:nvPr/>
+        </p:nvSpPr>
+        <p:spPr>
+          <a:xfrm>
+            <a:off x="6245352" y="1325880"/>
+            <a:ext cx="2670048" cy="109728"/>
+          </a:xfrm>
+          <a:prstGeom prst="rect">
+            <a:avLst/>
+          </a:prstGeom>
+          <a:solidFill>
+            <a:srgbClr val="7A4FA3"/>
+          </a:solidFill>
+          <a:ln>
+            <a:noFill/>
+          </a:ln>
+          <a:effectLst/>
+        </p:spPr>
+        <p:style>
+          <a:lnRef idx="1">
+            <a:schemeClr val="accent1"/>
+          </a:lnRef>
+          <a:fillRef idx="3">
+            <a:schemeClr val="accent1"/>
+          </a:fillRef>
+          <a:effectRef idx="2">
+            <a:schemeClr val="accent1"/>
+          </a:effectRef>
+          <a:fontRef idx="minor">
+            <a:schemeClr val="lt1"/>
+          </a:fontRef>
+        </p:style>
+        <p:txBody>
+          <a:bodyPr rtlCol="0" anchor="ctr"/>
+          <a:lstStyle/>
+          <a:p>
+            <a:pPr algn="ctr"/>
+          </a:p>
+        </p:txBody>
+      </p:sp>
+      <p:pic>
+        <p:nvPicPr>
+          <p:cNvPr id="17" name="Picture 16" descr="av_gus.png"/>
+          <p:cNvPicPr>
+            <a:picLocks noChangeAspect="1"/>
+          </p:cNvPicPr>
+          <p:nvPr/>
+        </p:nvPicPr>
+        <p:blipFill>
+          <a:blip r:embed="rId6"/>
+          <a:stretch>
+            <a:fillRect/>
+          </a:stretch>
+        </p:blipFill>
+        <p:spPr>
+          <a:xfrm>
+            <a:off x="6963156" y="1527048"/>
+            <a:ext cx="1234440" cy="1234440"/>
+          </a:xfrm>
+          <a:prstGeom prst="rect">
+            <a:avLst/>
+          </a:prstGeom>
+        </p:spPr>
+      </p:pic>
+      <p:sp>
+        <p:nvSpPr>
+          <p:cNvPr id="18" name="TextBox 17"/>
           <p:cNvSpPr txBox="1"/>
           <p:nvPr/>
         </p:nvSpPr>
         <p:spPr>
           <a:xfrm>
-            <a:off x="10332720" y="6446520"/>
-            <a:ext cx="1737360" cy="365760"/>
+            <a:off x="6336792" y="2807208"/>
+            <a:ext cx="2487168" cy="822960"/>
           </a:xfrm>
           <a:prstGeom prst="rect">
             <a:avLst/>
@@ -4671,15 +5425,911 @@
           </a:bodyPr>
           <a:lstStyle/>
           <a:p>
+            <a:pPr algn="ctr"/>
+            <a:r>
+              <a:rPr sz="1500" b="1" i="0">
+                <a:solidFill>
+                  <a:srgbClr val="1E2A24"/>
+                </a:solidFill>
+                <a:latin typeface="Calibri"/>
+              </a:rPr>
+              <a:t>Густаво Фринг</a:t>
+            </a:r>
+          </a:p>
+          <a:p>
+            <a:pPr algn="ctr"/>
+            <a:r>
+              <a:rPr sz="1200" b="0" i="0">
+                <a:solidFill>
+                  <a:srgbClr val="5B6B63"/>
+                </a:solidFill>
+                <a:latin typeface="Calibri"/>
+              </a:rPr>
+              <a:t>дистрибьютор</a:t>
+            </a:r>
+          </a:p>
+        </p:txBody>
+      </p:sp>
+      <p:sp>
+        <p:nvSpPr>
+          <p:cNvPr id="19" name="Rounded Rectangle 18"/>
+          <p:cNvSpPr/>
+          <p:nvPr/>
+        </p:nvSpPr>
+        <p:spPr>
+          <a:xfrm>
+            <a:off x="9116568" y="1325880"/>
+            <a:ext cx="2670048" cy="2331720"/>
+          </a:xfrm>
+          <a:prstGeom prst="roundRect">
+            <a:avLst/>
+          </a:prstGeom>
+          <a:solidFill>
+            <a:srgbClr val="F1F5F0"/>
+          </a:solidFill>
+          <a:ln w="15240">
+            <a:solidFill>
+              <a:srgbClr val="DDE5DC"/>
+            </a:solidFill>
+          </a:ln>
+          <a:effectLst/>
+        </p:spPr>
+        <p:style>
+          <a:lnRef idx="1">
+            <a:schemeClr val="accent1"/>
+          </a:lnRef>
+          <a:fillRef idx="3">
+            <a:schemeClr val="accent1"/>
+          </a:fillRef>
+          <a:effectRef idx="2">
+            <a:schemeClr val="accent1"/>
+          </a:effectRef>
+          <a:fontRef idx="minor">
+            <a:schemeClr val="lt1"/>
+          </a:fontRef>
+        </p:style>
+        <p:txBody>
+          <a:bodyPr rtlCol="0" anchor="ctr"/>
+          <a:lstStyle/>
+          <a:p>
+            <a:pPr algn="ctr"/>
+          </a:p>
+        </p:txBody>
+      </p:sp>
+      <p:sp>
+        <p:nvSpPr>
+          <p:cNvPr id="20" name="Rectangle 19"/>
+          <p:cNvSpPr/>
+          <p:nvPr/>
+        </p:nvSpPr>
+        <p:spPr>
+          <a:xfrm>
+            <a:off x="9116568" y="1325880"/>
+            <a:ext cx="2670048" cy="109728"/>
+          </a:xfrm>
+          <a:prstGeom prst="rect">
+            <a:avLst/>
+          </a:prstGeom>
+          <a:solidFill>
+            <a:srgbClr val="B8860B"/>
+          </a:solidFill>
+          <a:ln>
+            <a:noFill/>
+          </a:ln>
+          <a:effectLst/>
+        </p:spPr>
+        <p:style>
+          <a:lnRef idx="1">
+            <a:schemeClr val="accent1"/>
+          </a:lnRef>
+          <a:fillRef idx="3">
+            <a:schemeClr val="accent1"/>
+          </a:fillRef>
+          <a:effectRef idx="2">
+            <a:schemeClr val="accent1"/>
+          </a:effectRef>
+          <a:fontRef idx="minor">
+            <a:schemeClr val="lt1"/>
+          </a:fontRef>
+        </p:style>
+        <p:txBody>
+          <a:bodyPr rtlCol="0" anchor="ctr"/>
+          <a:lstStyle/>
+          <a:p>
+            <a:pPr algn="ctr"/>
+          </a:p>
+        </p:txBody>
+      </p:sp>
+      <p:pic>
+        <p:nvPicPr>
+          <p:cNvPr id="21" name="Picture 20" descr="av_hank.png"/>
+          <p:cNvPicPr>
+            <a:picLocks noChangeAspect="1"/>
+          </p:cNvPicPr>
+          <p:nvPr/>
+        </p:nvPicPr>
+        <p:blipFill>
+          <a:blip r:embed="rId7"/>
+          <a:stretch>
+            <a:fillRect/>
+          </a:stretch>
+        </p:blipFill>
+        <p:spPr>
+          <a:xfrm>
+            <a:off x="9834372" y="1527048"/>
+            <a:ext cx="1234440" cy="1234440"/>
+          </a:xfrm>
+          <a:prstGeom prst="rect">
+            <a:avLst/>
+          </a:prstGeom>
+        </p:spPr>
+      </p:pic>
+      <p:sp>
+        <p:nvSpPr>
+          <p:cNvPr id="22" name="TextBox 21"/>
+          <p:cNvSpPr txBox="1"/>
+          <p:nvPr/>
+        </p:nvSpPr>
+        <p:spPr>
+          <a:xfrm>
+            <a:off x="9208008" y="2807208"/>
+            <a:ext cx="2487168" cy="822960"/>
+          </a:xfrm>
+          <a:prstGeom prst="rect">
+            <a:avLst/>
+          </a:prstGeom>
+          <a:noFill/>
+        </p:spPr>
+        <p:txBody>
+          <a:bodyPr wrap="square">
+            <a:spAutoFit/>
+          </a:bodyPr>
+          <a:lstStyle/>
+          <a:p>
+            <a:pPr algn="ctr"/>
+            <a:r>
+              <a:rPr sz="1500" b="1" i="0">
+                <a:solidFill>
+                  <a:srgbClr val="1E2A24"/>
+                </a:solidFill>
+                <a:latin typeface="Calibri"/>
+              </a:rPr>
+              <a:t>Хэнк Шрейдер</a:t>
+            </a:r>
+          </a:p>
+          <a:p>
+            <a:pPr algn="ctr"/>
+            <a:r>
+              <a:rPr sz="1200" b="0" i="0">
+                <a:solidFill>
+                  <a:srgbClr val="5B6B63"/>
+                </a:solidFill>
+                <a:latin typeface="Calibri"/>
+              </a:rPr>
+              <a:t>агент DEA (детектив)</a:t>
+            </a:r>
+          </a:p>
+        </p:txBody>
+      </p:sp>
+      <p:sp>
+        <p:nvSpPr>
+          <p:cNvPr id="23" name="Rounded Rectangle 22"/>
+          <p:cNvSpPr/>
+          <p:nvPr/>
+        </p:nvSpPr>
+        <p:spPr>
+          <a:xfrm>
+            <a:off x="502920" y="3840480"/>
+            <a:ext cx="2670048" cy="2331720"/>
+          </a:xfrm>
+          <a:prstGeom prst="roundRect">
+            <a:avLst/>
+          </a:prstGeom>
+          <a:solidFill>
+            <a:srgbClr val="F1F5F0"/>
+          </a:solidFill>
+          <a:ln w="15240">
+            <a:solidFill>
+              <a:srgbClr val="DDE5DC"/>
+            </a:solidFill>
+          </a:ln>
+          <a:effectLst/>
+        </p:spPr>
+        <p:style>
+          <a:lnRef idx="1">
+            <a:schemeClr val="accent1"/>
+          </a:lnRef>
+          <a:fillRef idx="3">
+            <a:schemeClr val="accent1"/>
+          </a:fillRef>
+          <a:effectRef idx="2">
+            <a:schemeClr val="accent1"/>
+          </a:effectRef>
+          <a:fontRef idx="minor">
+            <a:schemeClr val="lt1"/>
+          </a:fontRef>
+        </p:style>
+        <p:txBody>
+          <a:bodyPr rtlCol="0" anchor="ctr"/>
+          <a:lstStyle/>
+          <a:p>
+            <a:pPr algn="ctr"/>
+          </a:p>
+        </p:txBody>
+      </p:sp>
+      <p:sp>
+        <p:nvSpPr>
+          <p:cNvPr id="24" name="Rectangle 23"/>
+          <p:cNvSpPr/>
+          <p:nvPr/>
+        </p:nvSpPr>
+        <p:spPr>
+          <a:xfrm>
+            <a:off x="502920" y="3840480"/>
+            <a:ext cx="2670048" cy="109728"/>
+          </a:xfrm>
+          <a:prstGeom prst="rect">
+            <a:avLst/>
+          </a:prstGeom>
+          <a:solidFill>
+            <a:srgbClr val="B0457A"/>
+          </a:solidFill>
+          <a:ln>
+            <a:noFill/>
+          </a:ln>
+          <a:effectLst/>
+        </p:spPr>
+        <p:style>
+          <a:lnRef idx="1">
+            <a:schemeClr val="accent1"/>
+          </a:lnRef>
+          <a:fillRef idx="3">
+            <a:schemeClr val="accent1"/>
+          </a:fillRef>
+          <a:effectRef idx="2">
+            <a:schemeClr val="accent1"/>
+          </a:effectRef>
+          <a:fontRef idx="minor">
+            <a:schemeClr val="lt1"/>
+          </a:fontRef>
+        </p:style>
+        <p:txBody>
+          <a:bodyPr rtlCol="0" anchor="ctr"/>
+          <a:lstStyle/>
+          <a:p>
+            <a:pPr algn="ctr"/>
+          </a:p>
+        </p:txBody>
+      </p:sp>
+      <p:pic>
+        <p:nvPicPr>
+          <p:cNvPr id="25" name="Picture 24" descr="av_skyler.png"/>
+          <p:cNvPicPr>
+            <a:picLocks noChangeAspect="1"/>
+          </p:cNvPicPr>
+          <p:nvPr/>
+        </p:nvPicPr>
+        <p:blipFill>
+          <a:blip r:embed="rId8"/>
+          <a:stretch>
+            <a:fillRect/>
+          </a:stretch>
+        </p:blipFill>
+        <p:spPr>
+          <a:xfrm>
+            <a:off x="1220724" y="4041648"/>
+            <a:ext cx="1234440" cy="1234440"/>
+          </a:xfrm>
+          <a:prstGeom prst="rect">
+            <a:avLst/>
+          </a:prstGeom>
+        </p:spPr>
+      </p:pic>
+      <p:sp>
+        <p:nvSpPr>
+          <p:cNvPr id="26" name="TextBox 25"/>
+          <p:cNvSpPr txBox="1"/>
+          <p:nvPr/>
+        </p:nvSpPr>
+        <p:spPr>
+          <a:xfrm>
+            <a:off x="594360" y="5321808"/>
+            <a:ext cx="2487168" cy="822960"/>
+          </a:xfrm>
+          <a:prstGeom prst="rect">
+            <a:avLst/>
+          </a:prstGeom>
+          <a:noFill/>
+        </p:spPr>
+        <p:txBody>
+          <a:bodyPr wrap="square">
+            <a:spAutoFit/>
+          </a:bodyPr>
+          <a:lstStyle/>
+          <a:p>
+            <a:pPr algn="ctr"/>
+            <a:r>
+              <a:rPr sz="1500" b="1" i="0">
+                <a:solidFill>
+                  <a:srgbClr val="1E2A24"/>
+                </a:solidFill>
+                <a:latin typeface="Calibri"/>
+              </a:rPr>
+              <a:t>Скайлер Уайт</a:t>
+            </a:r>
+          </a:p>
+          <a:p>
+            <a:pPr algn="ctr"/>
+            <a:r>
+              <a:rPr sz="1200" b="0" i="0">
+                <a:solidFill>
+                  <a:srgbClr val="5B6B63"/>
+                </a:solidFill>
+                <a:latin typeface="Calibri"/>
+              </a:rPr>
+              <a:t>жена, отмывание денег</a:t>
+            </a:r>
+          </a:p>
+        </p:txBody>
+      </p:sp>
+      <p:sp>
+        <p:nvSpPr>
+          <p:cNvPr id="27" name="Rounded Rectangle 26"/>
+          <p:cNvSpPr/>
+          <p:nvPr/>
+        </p:nvSpPr>
+        <p:spPr>
+          <a:xfrm>
+            <a:off x="3374136" y="3840480"/>
+            <a:ext cx="2670048" cy="2331720"/>
+          </a:xfrm>
+          <a:prstGeom prst="roundRect">
+            <a:avLst/>
+          </a:prstGeom>
+          <a:solidFill>
+            <a:srgbClr val="F1F5F0"/>
+          </a:solidFill>
+          <a:ln w="15240">
+            <a:solidFill>
+              <a:srgbClr val="DDE5DC"/>
+            </a:solidFill>
+          </a:ln>
+          <a:effectLst/>
+        </p:spPr>
+        <p:style>
+          <a:lnRef idx="1">
+            <a:schemeClr val="accent1"/>
+          </a:lnRef>
+          <a:fillRef idx="3">
+            <a:schemeClr val="accent1"/>
+          </a:fillRef>
+          <a:effectRef idx="2">
+            <a:schemeClr val="accent1"/>
+          </a:effectRef>
+          <a:fontRef idx="minor">
+            <a:schemeClr val="lt1"/>
+          </a:fontRef>
+        </p:style>
+        <p:txBody>
+          <a:bodyPr rtlCol="0" anchor="ctr"/>
+          <a:lstStyle/>
+          <a:p>
+            <a:pPr algn="ctr"/>
+          </a:p>
+        </p:txBody>
+      </p:sp>
+      <p:sp>
+        <p:nvSpPr>
+          <p:cNvPr id="28" name="Rectangle 27"/>
+          <p:cNvSpPr/>
+          <p:nvPr/>
+        </p:nvSpPr>
+        <p:spPr>
+          <a:xfrm>
+            <a:off x="3374136" y="3840480"/>
+            <a:ext cx="2670048" cy="109728"/>
+          </a:xfrm>
+          <a:prstGeom prst="rect">
+            <a:avLst/>
+          </a:prstGeom>
+          <a:solidFill>
+            <a:srgbClr val="D2691E"/>
+          </a:solidFill>
+          <a:ln>
+            <a:noFill/>
+          </a:ln>
+          <a:effectLst/>
+        </p:spPr>
+        <p:style>
+          <a:lnRef idx="1">
+            <a:schemeClr val="accent1"/>
+          </a:lnRef>
+          <a:fillRef idx="3">
+            <a:schemeClr val="accent1"/>
+          </a:fillRef>
+          <a:effectRef idx="2">
+            <a:schemeClr val="accent1"/>
+          </a:effectRef>
+          <a:fontRef idx="minor">
+            <a:schemeClr val="lt1"/>
+          </a:fontRef>
+        </p:style>
+        <p:txBody>
+          <a:bodyPr rtlCol="0" anchor="ctr"/>
+          <a:lstStyle/>
+          <a:p>
+            <a:pPr algn="ctr"/>
+          </a:p>
+        </p:txBody>
+      </p:sp>
+      <p:pic>
+        <p:nvPicPr>
+          <p:cNvPr id="29" name="Picture 28" descr="av_saul.png"/>
+          <p:cNvPicPr>
+            <a:picLocks noChangeAspect="1"/>
+          </p:cNvPicPr>
+          <p:nvPr/>
+        </p:nvPicPr>
+        <p:blipFill>
+          <a:blip r:embed="rId9"/>
+          <a:stretch>
+            <a:fillRect/>
+          </a:stretch>
+        </p:blipFill>
+        <p:spPr>
+          <a:xfrm>
+            <a:off x="4091940" y="4041648"/>
+            <a:ext cx="1234440" cy="1234440"/>
+          </a:xfrm>
+          <a:prstGeom prst="rect">
+            <a:avLst/>
+          </a:prstGeom>
+        </p:spPr>
+      </p:pic>
+      <p:sp>
+        <p:nvSpPr>
+          <p:cNvPr id="30" name="TextBox 29"/>
+          <p:cNvSpPr txBox="1"/>
+          <p:nvPr/>
+        </p:nvSpPr>
+        <p:spPr>
+          <a:xfrm>
+            <a:off x="3465576" y="5321808"/>
+            <a:ext cx="2487168" cy="822960"/>
+          </a:xfrm>
+          <a:prstGeom prst="rect">
+            <a:avLst/>
+          </a:prstGeom>
+          <a:noFill/>
+        </p:spPr>
+        <p:txBody>
+          <a:bodyPr wrap="square">
+            <a:spAutoFit/>
+          </a:bodyPr>
+          <a:lstStyle/>
+          <a:p>
+            <a:pPr algn="ctr"/>
+            <a:r>
+              <a:rPr sz="1500" b="1" i="0">
+                <a:solidFill>
+                  <a:srgbClr val="1E2A24"/>
+                </a:solidFill>
+                <a:latin typeface="Calibri"/>
+              </a:rPr>
+              <a:t>Сол Гудман</a:t>
+            </a:r>
+          </a:p>
+          <a:p>
+            <a:pPr algn="ctr"/>
+            <a:r>
+              <a:rPr sz="1200" b="0" i="0">
+                <a:solidFill>
+                  <a:srgbClr val="5B6B63"/>
+                </a:solidFill>
+                <a:latin typeface="Calibri"/>
+              </a:rPr>
+              <a:t>адвокат, прикрытие</a:t>
+            </a:r>
+          </a:p>
+        </p:txBody>
+      </p:sp>
+      <p:sp>
+        <p:nvSpPr>
+          <p:cNvPr id="31" name="Rounded Rectangle 30"/>
+          <p:cNvSpPr/>
+          <p:nvPr/>
+        </p:nvSpPr>
+        <p:spPr>
+          <a:xfrm>
+            <a:off x="6245352" y="3840480"/>
+            <a:ext cx="2670048" cy="2331720"/>
+          </a:xfrm>
+          <a:prstGeom prst="roundRect">
+            <a:avLst/>
+          </a:prstGeom>
+          <a:solidFill>
+            <a:srgbClr val="F1F5F0"/>
+          </a:solidFill>
+          <a:ln w="15240">
+            <a:solidFill>
+              <a:srgbClr val="DDE5DC"/>
+            </a:solidFill>
+          </a:ln>
+          <a:effectLst/>
+        </p:spPr>
+        <p:style>
+          <a:lnRef idx="1">
+            <a:schemeClr val="accent1"/>
+          </a:lnRef>
+          <a:fillRef idx="3">
+            <a:schemeClr val="accent1"/>
+          </a:fillRef>
+          <a:effectRef idx="2">
+            <a:schemeClr val="accent1"/>
+          </a:effectRef>
+          <a:fontRef idx="minor">
+            <a:schemeClr val="lt1"/>
+          </a:fontRef>
+        </p:style>
+        <p:txBody>
+          <a:bodyPr rtlCol="0" anchor="ctr"/>
+          <a:lstStyle/>
+          <a:p>
+            <a:pPr algn="ctr"/>
+          </a:p>
+        </p:txBody>
+      </p:sp>
+      <p:sp>
+        <p:nvSpPr>
+          <p:cNvPr id="32" name="Rectangle 31"/>
+          <p:cNvSpPr/>
+          <p:nvPr/>
+        </p:nvSpPr>
+        <p:spPr>
+          <a:xfrm>
+            <a:off x="6245352" y="3840480"/>
+            <a:ext cx="2670048" cy="109728"/>
+          </a:xfrm>
+          <a:prstGeom prst="rect">
+            <a:avLst/>
+          </a:prstGeom>
+          <a:solidFill>
+            <a:srgbClr val="5A6B73"/>
+          </a:solidFill>
+          <a:ln>
+            <a:noFill/>
+          </a:ln>
+          <a:effectLst/>
+        </p:spPr>
+        <p:style>
+          <a:lnRef idx="1">
+            <a:schemeClr val="accent1"/>
+          </a:lnRef>
+          <a:fillRef idx="3">
+            <a:schemeClr val="accent1"/>
+          </a:fillRef>
+          <a:effectRef idx="2">
+            <a:schemeClr val="accent1"/>
+          </a:effectRef>
+          <a:fontRef idx="minor">
+            <a:schemeClr val="lt1"/>
+          </a:fontRef>
+        </p:style>
+        <p:txBody>
+          <a:bodyPr rtlCol="0" anchor="ctr"/>
+          <a:lstStyle/>
+          <a:p>
+            <a:pPr algn="ctr"/>
+          </a:p>
+        </p:txBody>
+      </p:sp>
+      <p:pic>
+        <p:nvPicPr>
+          <p:cNvPr id="33" name="Picture 32" descr="av_mike.png"/>
+          <p:cNvPicPr>
+            <a:picLocks noChangeAspect="1"/>
+          </p:cNvPicPr>
+          <p:nvPr/>
+        </p:nvPicPr>
+        <p:blipFill>
+          <a:blip r:embed="rId10"/>
+          <a:stretch>
+            <a:fillRect/>
+          </a:stretch>
+        </p:blipFill>
+        <p:spPr>
+          <a:xfrm>
+            <a:off x="6963156" y="4041648"/>
+            <a:ext cx="1234440" cy="1234440"/>
+          </a:xfrm>
+          <a:prstGeom prst="rect">
+            <a:avLst/>
+          </a:prstGeom>
+        </p:spPr>
+      </p:pic>
+      <p:sp>
+        <p:nvSpPr>
+          <p:cNvPr id="34" name="TextBox 33"/>
+          <p:cNvSpPr txBox="1"/>
+          <p:nvPr/>
+        </p:nvSpPr>
+        <p:spPr>
+          <a:xfrm>
+            <a:off x="6336792" y="5321808"/>
+            <a:ext cx="2487168" cy="822960"/>
+          </a:xfrm>
+          <a:prstGeom prst="rect">
+            <a:avLst/>
+          </a:prstGeom>
+          <a:noFill/>
+        </p:spPr>
+        <p:txBody>
+          <a:bodyPr wrap="square">
+            <a:spAutoFit/>
+          </a:bodyPr>
+          <a:lstStyle/>
+          <a:p>
+            <a:pPr algn="ctr"/>
+            <a:r>
+              <a:rPr sz="1500" b="1" i="0">
+                <a:solidFill>
+                  <a:srgbClr val="1E2A24"/>
+                </a:solidFill>
+                <a:latin typeface="Calibri"/>
+              </a:rPr>
+              <a:t>Майк Эрмантраут</a:t>
+            </a:r>
+          </a:p>
+          <a:p>
+            <a:pPr algn="ctr"/>
+            <a:r>
+              <a:rPr sz="1200" b="0" i="0">
+                <a:solidFill>
+                  <a:srgbClr val="5B6B63"/>
+                </a:solidFill>
+                <a:latin typeface="Calibri"/>
+              </a:rPr>
+              <a:t>охрана, «решала»</a:t>
+            </a:r>
+          </a:p>
+        </p:txBody>
+      </p:sp>
+      <p:sp>
+        <p:nvSpPr>
+          <p:cNvPr id="35" name="Rounded Rectangle 34"/>
+          <p:cNvSpPr/>
+          <p:nvPr/>
+        </p:nvSpPr>
+        <p:spPr>
+          <a:xfrm>
+            <a:off x="9116568" y="3840480"/>
+            <a:ext cx="2670048" cy="2331720"/>
+          </a:xfrm>
+          <a:prstGeom prst="roundRect">
+            <a:avLst/>
+          </a:prstGeom>
+          <a:solidFill>
+            <a:srgbClr val="F1F5F0"/>
+          </a:solidFill>
+          <a:ln w="15240">
+            <a:solidFill>
+              <a:srgbClr val="DDE5DC"/>
+            </a:solidFill>
+          </a:ln>
+          <a:effectLst/>
+        </p:spPr>
+        <p:style>
+          <a:lnRef idx="1">
+            <a:schemeClr val="accent1"/>
+          </a:lnRef>
+          <a:fillRef idx="3">
+            <a:schemeClr val="accent1"/>
+          </a:fillRef>
+          <a:effectRef idx="2">
+            <a:schemeClr val="accent1"/>
+          </a:effectRef>
+          <a:fontRef idx="minor">
+            <a:schemeClr val="lt1"/>
+          </a:fontRef>
+        </p:style>
+        <p:txBody>
+          <a:bodyPr rtlCol="0" anchor="ctr"/>
+          <a:lstStyle/>
+          <a:p>
+            <a:pPr algn="ctr"/>
+          </a:p>
+        </p:txBody>
+      </p:sp>
+      <p:sp>
+        <p:nvSpPr>
+          <p:cNvPr id="36" name="Rectangle 35"/>
+          <p:cNvSpPr/>
+          <p:nvPr/>
+        </p:nvSpPr>
+        <p:spPr>
+          <a:xfrm>
+            <a:off x="9116568" y="3840480"/>
+            <a:ext cx="2670048" cy="109728"/>
+          </a:xfrm>
+          <a:prstGeom prst="rect">
+            <a:avLst/>
+          </a:prstGeom>
+          <a:solidFill>
+            <a:srgbClr val="6E7B47"/>
+          </a:solidFill>
+          <a:ln>
+            <a:noFill/>
+          </a:ln>
+          <a:effectLst/>
+        </p:spPr>
+        <p:style>
+          <a:lnRef idx="1">
+            <a:schemeClr val="accent1"/>
+          </a:lnRef>
+          <a:fillRef idx="3">
+            <a:schemeClr val="accent1"/>
+          </a:fillRef>
+          <a:effectRef idx="2">
+            <a:schemeClr val="accent1"/>
+          </a:effectRef>
+          <a:fontRef idx="minor">
+            <a:schemeClr val="lt1"/>
+          </a:fontRef>
+        </p:style>
+        <p:txBody>
+          <a:bodyPr rtlCol="0" anchor="ctr"/>
+          <a:lstStyle/>
+          <a:p>
+            <a:pPr algn="ctr"/>
+          </a:p>
+        </p:txBody>
+      </p:sp>
+      <p:pic>
+        <p:nvPicPr>
+          <p:cNvPr id="37" name="Picture 36" descr="av_gale.png"/>
+          <p:cNvPicPr>
+            <a:picLocks noChangeAspect="1"/>
+          </p:cNvPicPr>
+          <p:nvPr/>
+        </p:nvPicPr>
+        <p:blipFill>
+          <a:blip r:embed="rId11"/>
+          <a:stretch>
+            <a:fillRect/>
+          </a:stretch>
+        </p:blipFill>
+        <p:spPr>
+          <a:xfrm>
+            <a:off x="9834372" y="4041648"/>
+            <a:ext cx="1234440" cy="1234440"/>
+          </a:xfrm>
+          <a:prstGeom prst="rect">
+            <a:avLst/>
+          </a:prstGeom>
+        </p:spPr>
+      </p:pic>
+      <p:sp>
+        <p:nvSpPr>
+          <p:cNvPr id="38" name="TextBox 37"/>
+          <p:cNvSpPr txBox="1"/>
+          <p:nvPr/>
+        </p:nvSpPr>
+        <p:spPr>
+          <a:xfrm>
+            <a:off x="9208008" y="5321808"/>
+            <a:ext cx="2487168" cy="822960"/>
+          </a:xfrm>
+          <a:prstGeom prst="rect">
+            <a:avLst/>
+          </a:prstGeom>
+          <a:noFill/>
+        </p:spPr>
+        <p:txBody>
+          <a:bodyPr wrap="square">
+            <a:spAutoFit/>
+          </a:bodyPr>
+          <a:lstStyle/>
+          <a:p>
+            <a:pPr algn="ctr"/>
+            <a:r>
+              <a:rPr sz="1500" b="1" i="0">
+                <a:solidFill>
+                  <a:srgbClr val="1E2A24"/>
+                </a:solidFill>
+                <a:latin typeface="Calibri"/>
+              </a:rPr>
+              <a:t>Гейл Боттикер</a:t>
+            </a:r>
+          </a:p>
+          <a:p>
+            <a:pPr algn="ctr"/>
+            <a:r>
+              <a:rPr sz="1200" b="0" i="0">
+                <a:solidFill>
+                  <a:srgbClr val="5B6B63"/>
+                </a:solidFill>
+                <a:latin typeface="Calibri"/>
+              </a:rPr>
+              <a:t>химик — жертва</a:t>
+            </a:r>
+          </a:p>
+        </p:txBody>
+      </p:sp>
+      <p:sp>
+        <p:nvSpPr>
+          <p:cNvPr id="39" name="Rectangle 38"/>
+          <p:cNvSpPr/>
+          <p:nvPr/>
+        </p:nvSpPr>
+        <p:spPr>
+          <a:xfrm>
+            <a:off x="411480" y="6455664"/>
+            <a:ext cx="2926080" cy="27940"/>
+          </a:xfrm>
+          <a:prstGeom prst="rect">
+            <a:avLst/>
+          </a:prstGeom>
+          <a:solidFill>
+            <a:srgbClr val="5AA634"/>
+          </a:solidFill>
+          <a:ln>
+            <a:noFill/>
+          </a:ln>
+          <a:effectLst/>
+        </p:spPr>
+        <p:style>
+          <a:lnRef idx="1">
+            <a:schemeClr val="accent1"/>
+          </a:lnRef>
+          <a:fillRef idx="3">
+            <a:schemeClr val="accent1"/>
+          </a:fillRef>
+          <a:effectRef idx="2">
+            <a:schemeClr val="accent1"/>
+          </a:effectRef>
+          <a:fontRef idx="minor">
+            <a:schemeClr val="lt1"/>
+          </a:fontRef>
+        </p:style>
+        <p:txBody>
+          <a:bodyPr rtlCol="0" anchor="ctr"/>
+          <a:lstStyle/>
+          <a:p>
+            <a:pPr algn="ctr"/>
+          </a:p>
+        </p:txBody>
+      </p:sp>
+      <p:sp>
+        <p:nvSpPr>
+          <p:cNvPr id="40" name="TextBox 39"/>
+          <p:cNvSpPr txBox="1"/>
+          <p:nvPr/>
+        </p:nvSpPr>
+        <p:spPr>
+          <a:xfrm>
+            <a:off x="9875520" y="6355080"/>
+            <a:ext cx="2194560" cy="365760"/>
+          </a:xfrm>
+          <a:prstGeom prst="rect">
+            <a:avLst/>
+          </a:prstGeom>
+          <a:noFill/>
+        </p:spPr>
+        <p:txBody>
+          <a:bodyPr wrap="square">
+            <a:spAutoFit/>
+          </a:bodyPr>
+          <a:lstStyle/>
+          <a:p>
             <a:pPr algn="r"/>
             <a:r>
-              <a:rPr sz="1100" b="0" i="0">
-                <a:solidFill>
-                  <a:srgbClr val="555555"/>
-                </a:solidFill>
-                <a:latin typeface="Calibri"/>
-              </a:rPr>
-              <a:t>ЛР №9  •  4</a:t>
+              <a:rPr sz="1000" b="0" i="0">
+                <a:solidFill>
+                  <a:srgbClr val="5B6B63"/>
+                </a:solidFill>
+                <a:latin typeface="Calibri"/>
+              </a:rPr>
+              <a:t>Во все тяжкие · ЛР №9 · 4</a:t>
             </a:r>
           </a:p>
         </p:txBody>
@@ -4719,13 +6369,13 @@
         <p:spPr>
           <a:xfrm>
             <a:off x="0" y="0"/>
-            <a:ext cx="12191695" cy="1051560"/>
+            <a:ext cx="12191695" cy="1024128"/>
           </a:xfrm>
           <a:prstGeom prst="rect">
             <a:avLst/>
           </a:prstGeom>
           <a:solidFill>
-            <a:srgbClr val="1A3C5E"/>
+            <a:srgbClr val="14211A"/>
           </a:solidFill>
           <a:ln>
             <a:noFill/>
@@ -4756,41 +6406,51 @@
       </p:sp>
       <p:sp>
         <p:nvSpPr>
-          <p:cNvPr id="3" name="TextBox 2"/>
-          <p:cNvSpPr txBox="1"/>
-          <p:nvPr/>
-        </p:nvSpPr>
-        <p:spPr>
-          <a:xfrm>
-            <a:off x="457200" y="109728"/>
-            <a:ext cx="11247120" cy="868680"/>
-          </a:xfrm>
-          <a:prstGeom prst="rect">
-            <a:avLst/>
-          </a:prstGeom>
-          <a:noFill/>
-        </p:spPr>
-        <p:txBody>
-          <a:bodyPr wrap="square" anchor="ctr">
-            <a:spAutoFit/>
-          </a:bodyPr>
-          <a:lstStyle/>
-          <a:p>
-            <a:r>
-              <a:rPr sz="3000" b="1" i="0">
-                <a:solidFill>
-                  <a:srgbClr val="FFFFFF"/>
-                </a:solidFill>
-                <a:latin typeface="Calibri"/>
-              </a:rPr>
-              <a:t>Хронология ключевых событий</a:t>
-            </a:r>
+          <p:cNvPr id="3" name="Rectangle 2"/>
+          <p:cNvSpPr/>
+          <p:nvPr/>
+        </p:nvSpPr>
+        <p:spPr>
+          <a:xfrm>
+            <a:off x="0" y="0"/>
+            <a:ext cx="164592" cy="1024128"/>
+          </a:xfrm>
+          <a:prstGeom prst="rect">
+            <a:avLst/>
+          </a:prstGeom>
+          <a:solidFill>
+            <a:srgbClr val="5AA634"/>
+          </a:solidFill>
+          <a:ln>
+            <a:noFill/>
+          </a:ln>
+          <a:effectLst/>
+        </p:spPr>
+        <p:style>
+          <a:lnRef idx="1">
+            <a:schemeClr val="accent1"/>
+          </a:lnRef>
+          <a:fillRef idx="3">
+            <a:schemeClr val="accent1"/>
+          </a:fillRef>
+          <a:effectRef idx="2">
+            <a:schemeClr val="accent1"/>
+          </a:effectRef>
+          <a:fontRef idx="minor">
+            <a:schemeClr val="lt1"/>
+          </a:fontRef>
+        </p:style>
+        <p:txBody>
+          <a:bodyPr rtlCol="0" anchor="ctr"/>
+          <a:lstStyle/>
+          <a:p>
+            <a:pPr algn="ctr"/>
           </a:p>
         </p:txBody>
       </p:sp>
       <p:pic>
         <p:nvPicPr>
-          <p:cNvPr id="4" name="Picture 3" descr="timeline.png"/>
+          <p:cNvPr id="4" name="Picture 3" descr="tile_br.png"/>
           <p:cNvPicPr>
             <a:picLocks noChangeAspect="1"/>
           </p:cNvPicPr>
@@ -4804,24 +6464,845 @@
         </p:blipFill>
         <p:spPr>
           <a:xfrm>
-            <a:off x="365760" y="1783877"/>
-            <a:ext cx="11430000" cy="4296085"/>
+            <a:off x="10927080" y="149448"/>
+            <a:ext cx="731520" cy="725231"/>
           </a:xfrm>
           <a:prstGeom prst="rect">
             <a:avLst/>
           </a:prstGeom>
         </p:spPr>
       </p:pic>
-      <p:sp>
-        <p:nvSpPr>
-          <p:cNvPr id="5" name="TextBox 4"/>
+      <p:pic>
+        <p:nvPicPr>
+          <p:cNvPr id="5" name="Picture 4" descr="tile_ba.png"/>
+          <p:cNvPicPr>
+            <a:picLocks noChangeAspect="1"/>
+          </p:cNvPicPr>
+          <p:nvPr/>
+        </p:nvPicPr>
+        <p:blipFill>
+          <a:blip r:embed="rId3"/>
+          <a:stretch>
+            <a:fillRect/>
+          </a:stretch>
+        </p:blipFill>
+        <p:spPr>
+          <a:xfrm>
+            <a:off x="11430000" y="149448"/>
+            <a:ext cx="731520" cy="725231"/>
+          </a:xfrm>
+          <a:prstGeom prst="rect">
+            <a:avLst/>
+          </a:prstGeom>
+        </p:spPr>
+      </p:pic>
+      <p:sp>
+        <p:nvSpPr>
+          <p:cNvPr id="6" name="TextBox 5"/>
           <p:cNvSpPr txBox="1"/>
           <p:nvPr/>
         </p:nvSpPr>
         <p:spPr>
           <a:xfrm>
-            <a:off x="10332720" y="6446520"/>
-            <a:ext cx="1737360" cy="365760"/>
+            <a:off x="411480" y="91440"/>
+            <a:ext cx="10241280" cy="868680"/>
+          </a:xfrm>
+          <a:prstGeom prst="rect">
+            <a:avLst/>
+          </a:prstGeom>
+          <a:noFill/>
+        </p:spPr>
+        <p:txBody>
+          <a:bodyPr wrap="square" anchor="ctr">
+            <a:spAutoFit/>
+          </a:bodyPr>
+          <a:lstStyle/>
+          <a:p>
+            <a:r>
+              <a:rPr sz="2800" b="1" i="0">
+                <a:solidFill>
+                  <a:srgbClr val="FFFFFF"/>
+                </a:solidFill>
+                <a:latin typeface="Calibri"/>
+              </a:rPr>
+              <a:t>Ключевые сущности схемы</a:t>
+            </a:r>
+          </a:p>
+        </p:txBody>
+      </p:sp>
+      <p:sp>
+        <p:nvSpPr>
+          <p:cNvPr id="7" name="Rounded Rectangle 6"/>
+          <p:cNvSpPr/>
+          <p:nvPr/>
+        </p:nvSpPr>
+        <p:spPr>
+          <a:xfrm>
+            <a:off x="502920" y="1371600"/>
+            <a:ext cx="3657600" cy="566928"/>
+          </a:xfrm>
+          <a:prstGeom prst="roundRect">
+            <a:avLst/>
+          </a:prstGeom>
+          <a:solidFill>
+            <a:srgbClr val="BBD7F2"/>
+          </a:solidFill>
+          <a:ln w="15240">
+            <a:solidFill>
+              <a:srgbClr val="AAAAAA"/>
+            </a:solidFill>
+          </a:ln>
+          <a:effectLst/>
+        </p:spPr>
+        <p:style>
+          <a:lnRef idx="1">
+            <a:schemeClr val="accent1"/>
+          </a:lnRef>
+          <a:fillRef idx="3">
+            <a:schemeClr val="accent1"/>
+          </a:fillRef>
+          <a:effectRef idx="2">
+            <a:schemeClr val="accent1"/>
+          </a:effectRef>
+          <a:fontRef idx="minor">
+            <a:schemeClr val="lt1"/>
+          </a:fontRef>
+        </p:style>
+        <p:txBody>
+          <a:bodyPr rtlCol="0" anchor="ctr"/>
+          <a:lstStyle/>
+          <a:p>
+            <a:pPr algn="ctr"/>
+            <a:r>
+              <a:rPr sz="1600" b="1" i="0">
+                <a:solidFill>
+                  <a:srgbClr val="1E2A24"/>
+                </a:solidFill>
+                <a:latin typeface="Calibri"/>
+              </a:rPr>
+              <a:t>ПЕРСОНАЖИ</a:t>
+            </a:r>
+          </a:p>
+        </p:txBody>
+      </p:sp>
+      <p:sp>
+        <p:nvSpPr>
+          <p:cNvPr id="8" name="Rounded Rectangle 7"/>
+          <p:cNvSpPr/>
+          <p:nvPr/>
+        </p:nvSpPr>
+        <p:spPr>
+          <a:xfrm>
+            <a:off x="502920" y="2011680"/>
+            <a:ext cx="3657600" cy="4206240"/>
+          </a:xfrm>
+          <a:prstGeom prst="roundRect">
+            <a:avLst/>
+          </a:prstGeom>
+          <a:solidFill>
+            <a:srgbClr val="F1F5F0"/>
+          </a:solidFill>
+          <a:ln w="15240">
+            <a:solidFill>
+              <a:srgbClr val="DDE5DC"/>
+            </a:solidFill>
+          </a:ln>
+          <a:effectLst/>
+        </p:spPr>
+        <p:style>
+          <a:lnRef idx="1">
+            <a:schemeClr val="accent1"/>
+          </a:lnRef>
+          <a:fillRef idx="3">
+            <a:schemeClr val="accent1"/>
+          </a:fillRef>
+          <a:effectRef idx="2">
+            <a:schemeClr val="accent1"/>
+          </a:effectRef>
+          <a:fontRef idx="minor">
+            <a:schemeClr val="lt1"/>
+          </a:fontRef>
+        </p:style>
+        <p:txBody>
+          <a:bodyPr rtlCol="0" anchor="ctr" wrap="square" lIns="182880" tIns="146304"/>
+          <a:lstStyle/>
+          <a:p>
+            <a:pPr algn="ctr">
+              <a:spcAft>
+                <a:spcPts val="900"/>
+              </a:spcAft>
+            </a:pPr>
+            <a:r>
+              <a:rPr sz="1400" b="1" i="0">
+                <a:solidFill>
+                  <a:srgbClr val="5AA634"/>
+                </a:solidFill>
+                <a:latin typeface="Calibri"/>
+              </a:rPr>
+              <a:t>•  </a:t>
+            </a:r>
+            <a:r>
+              <a:rPr sz="1400" b="0" i="0">
+                <a:solidFill>
+                  <a:srgbClr val="1E2A24"/>
+                </a:solidFill>
+                <a:latin typeface="Calibri"/>
+              </a:rPr>
+              <a:t>Уолт «Хайзенберг» — организатор</a:t>
+            </a:r>
+          </a:p>
+          <a:p>
+            <a:pPr>
+              <a:spcAft>
+                <a:spcPts val="900"/>
+              </a:spcAft>
+            </a:pPr>
+            <a:r>
+              <a:rPr sz="1400" b="1" i="0">
+                <a:solidFill>
+                  <a:srgbClr val="5AA634"/>
+                </a:solidFill>
+                <a:latin typeface="Calibri"/>
+              </a:rPr>
+              <a:t>•  </a:t>
+            </a:r>
+            <a:r>
+              <a:rPr sz="1400" b="0" i="0">
+                <a:solidFill>
+                  <a:srgbClr val="1E2A24"/>
+                </a:solidFill>
+                <a:latin typeface="Calibri"/>
+              </a:rPr>
+              <a:t>Джесси Пинкман — сообщник</a:t>
+            </a:r>
+          </a:p>
+          <a:p>
+            <a:pPr>
+              <a:spcAft>
+                <a:spcPts val="900"/>
+              </a:spcAft>
+            </a:pPr>
+            <a:r>
+              <a:rPr sz="1400" b="1" i="0">
+                <a:solidFill>
+                  <a:srgbClr val="5AA634"/>
+                </a:solidFill>
+                <a:latin typeface="Calibri"/>
+              </a:rPr>
+              <a:t>•  </a:t>
+            </a:r>
+            <a:r>
+              <a:rPr sz="1400" b="0" i="0">
+                <a:solidFill>
+                  <a:srgbClr val="1E2A24"/>
+                </a:solidFill>
+                <a:latin typeface="Calibri"/>
+              </a:rPr>
+              <a:t>Густаво Фринг — дистрибьютор</a:t>
+            </a:r>
+          </a:p>
+          <a:p>
+            <a:pPr>
+              <a:spcAft>
+                <a:spcPts val="900"/>
+              </a:spcAft>
+            </a:pPr>
+            <a:r>
+              <a:rPr sz="1400" b="1" i="0">
+                <a:solidFill>
+                  <a:srgbClr val="5AA634"/>
+                </a:solidFill>
+                <a:latin typeface="Calibri"/>
+              </a:rPr>
+              <a:t>•  </a:t>
+            </a:r>
+            <a:r>
+              <a:rPr sz="1400" b="0" i="0">
+                <a:solidFill>
+                  <a:srgbClr val="1E2A24"/>
+                </a:solidFill>
+                <a:latin typeface="Calibri"/>
+              </a:rPr>
+              <a:t>Майк · Сол · Лидия — инфраструктура</a:t>
+            </a:r>
+          </a:p>
+          <a:p>
+            <a:pPr>
+              <a:spcAft>
+                <a:spcPts val="900"/>
+              </a:spcAft>
+            </a:pPr>
+            <a:r>
+              <a:rPr sz="1400" b="1" i="0">
+                <a:solidFill>
+                  <a:srgbClr val="5AA634"/>
+                </a:solidFill>
+                <a:latin typeface="Calibri"/>
+              </a:rPr>
+              <a:t>•  </a:t>
+            </a:r>
+            <a:r>
+              <a:rPr sz="1400" b="0" i="0">
+                <a:solidFill>
+                  <a:srgbClr val="1E2A24"/>
+                </a:solidFill>
+                <a:latin typeface="Calibri"/>
+              </a:rPr>
+              <a:t>Хэнк (DEA) — детектив</a:t>
+            </a:r>
+          </a:p>
+          <a:p>
+            <a:pPr>
+              <a:spcAft>
+                <a:spcPts val="900"/>
+              </a:spcAft>
+            </a:pPr>
+            <a:r>
+              <a:rPr sz="1400" b="1" i="0">
+                <a:solidFill>
+                  <a:srgbClr val="5AA634"/>
+                </a:solidFill>
+                <a:latin typeface="Calibri"/>
+              </a:rPr>
+              <a:t>•  </a:t>
+            </a:r>
+            <a:r>
+              <a:rPr sz="1400" b="0" i="0">
+                <a:solidFill>
+                  <a:srgbClr val="1E2A24"/>
+                </a:solidFill>
+                <a:latin typeface="Calibri"/>
+              </a:rPr>
+              <a:t>Гейл, Брок — жертвы</a:t>
+            </a:r>
+          </a:p>
+        </p:txBody>
+      </p:sp>
+      <p:sp>
+        <p:nvSpPr>
+          <p:cNvPr id="9" name="Rounded Rectangle 8"/>
+          <p:cNvSpPr/>
+          <p:nvPr/>
+        </p:nvSpPr>
+        <p:spPr>
+          <a:xfrm>
+            <a:off x="4407408" y="1371600"/>
+            <a:ext cx="3657600" cy="566928"/>
+          </a:xfrm>
+          <a:prstGeom prst="roundRect">
+            <a:avLst/>
+          </a:prstGeom>
+          <a:solidFill>
+            <a:srgbClr val="F8B5B0"/>
+          </a:solidFill>
+          <a:ln w="15240">
+            <a:solidFill>
+              <a:srgbClr val="AAAAAA"/>
+            </a:solidFill>
+          </a:ln>
+          <a:effectLst/>
+        </p:spPr>
+        <p:style>
+          <a:lnRef idx="1">
+            <a:schemeClr val="accent1"/>
+          </a:lnRef>
+          <a:fillRef idx="3">
+            <a:schemeClr val="accent1"/>
+          </a:fillRef>
+          <a:effectRef idx="2">
+            <a:schemeClr val="accent1"/>
+          </a:effectRef>
+          <a:fontRef idx="minor">
+            <a:schemeClr val="lt1"/>
+          </a:fontRef>
+        </p:style>
+        <p:txBody>
+          <a:bodyPr rtlCol="0" anchor="ctr"/>
+          <a:lstStyle/>
+          <a:p>
+            <a:pPr algn="ctr"/>
+            <a:r>
+              <a:rPr sz="1600" b="1" i="0">
+                <a:solidFill>
+                  <a:srgbClr val="1E2A24"/>
+                </a:solidFill>
+                <a:latin typeface="Calibri"/>
+              </a:rPr>
+              <a:t>СОБЫТИЯ</a:t>
+            </a:r>
+          </a:p>
+        </p:txBody>
+      </p:sp>
+      <p:sp>
+        <p:nvSpPr>
+          <p:cNvPr id="10" name="Rounded Rectangle 9"/>
+          <p:cNvSpPr/>
+          <p:nvPr/>
+        </p:nvSpPr>
+        <p:spPr>
+          <a:xfrm>
+            <a:off x="4407408" y="2011680"/>
+            <a:ext cx="3657600" cy="4206240"/>
+          </a:xfrm>
+          <a:prstGeom prst="roundRect">
+            <a:avLst/>
+          </a:prstGeom>
+          <a:solidFill>
+            <a:srgbClr val="F1F5F0"/>
+          </a:solidFill>
+          <a:ln w="15240">
+            <a:solidFill>
+              <a:srgbClr val="DDE5DC"/>
+            </a:solidFill>
+          </a:ln>
+          <a:effectLst/>
+        </p:spPr>
+        <p:style>
+          <a:lnRef idx="1">
+            <a:schemeClr val="accent1"/>
+          </a:lnRef>
+          <a:fillRef idx="3">
+            <a:schemeClr val="accent1"/>
+          </a:fillRef>
+          <a:effectRef idx="2">
+            <a:schemeClr val="accent1"/>
+          </a:effectRef>
+          <a:fontRef idx="minor">
+            <a:schemeClr val="lt1"/>
+          </a:fontRef>
+        </p:style>
+        <p:txBody>
+          <a:bodyPr rtlCol="0" anchor="ctr" wrap="square" lIns="182880" tIns="146304"/>
+          <a:lstStyle/>
+          <a:p>
+            <a:pPr algn="ctr">
+              <a:spcAft>
+                <a:spcPts val="900"/>
+              </a:spcAft>
+            </a:pPr>
+            <a:r>
+              <a:rPr sz="1400" b="1" i="0">
+                <a:solidFill>
+                  <a:srgbClr val="5AA634"/>
+                </a:solidFill>
+                <a:latin typeface="Calibri"/>
+              </a:rPr>
+              <a:t>•  </a:t>
+            </a:r>
+            <a:r>
+              <a:rPr sz="1400" b="0" i="0">
+                <a:solidFill>
+                  <a:srgbClr val="1E2A24"/>
+                </a:solidFill>
+                <a:latin typeface="Calibri"/>
+              </a:rPr>
+              <a:t>Производство «голубого мета»</a:t>
+            </a:r>
+          </a:p>
+          <a:p>
+            <a:pPr>
+              <a:spcAft>
+                <a:spcPts val="900"/>
+              </a:spcAft>
+            </a:pPr>
+            <a:r>
+              <a:rPr sz="1400" b="1" i="0">
+                <a:solidFill>
+                  <a:srgbClr val="5AA634"/>
+                </a:solidFill>
+                <a:latin typeface="Calibri"/>
+              </a:rPr>
+              <a:t>•  </a:t>
+            </a:r>
+            <a:r>
+              <a:rPr sz="1400" b="0" i="0">
+                <a:solidFill>
+                  <a:srgbClr val="1E2A24"/>
+                </a:solidFill>
+                <a:latin typeface="Calibri"/>
+              </a:rPr>
+              <a:t>Убийство Гейла</a:t>
+            </a:r>
+          </a:p>
+          <a:p>
+            <a:pPr>
+              <a:spcAft>
+                <a:spcPts val="900"/>
+              </a:spcAft>
+            </a:pPr>
+            <a:r>
+              <a:rPr sz="1400" b="1" i="0">
+                <a:solidFill>
+                  <a:srgbClr val="5AA634"/>
+                </a:solidFill>
+                <a:latin typeface="Calibri"/>
+              </a:rPr>
+              <a:t>•  </a:t>
+            </a:r>
+            <a:r>
+              <a:rPr sz="1400" b="0" i="0">
+                <a:solidFill>
+                  <a:srgbClr val="1E2A24"/>
+                </a:solidFill>
+                <a:latin typeface="Calibri"/>
+              </a:rPr>
+              <a:t>Отравление Брока (рицин)</a:t>
+            </a:r>
+          </a:p>
+          <a:p>
+            <a:pPr>
+              <a:spcAft>
+                <a:spcPts val="900"/>
+              </a:spcAft>
+            </a:pPr>
+            <a:r>
+              <a:rPr sz="1400" b="1" i="0">
+                <a:solidFill>
+                  <a:srgbClr val="5AA634"/>
+                </a:solidFill>
+                <a:latin typeface="Calibri"/>
+              </a:rPr>
+              <a:t>•  </a:t>
+            </a:r>
+            <a:r>
+              <a:rPr sz="1400" b="0" i="0">
+                <a:solidFill>
+                  <a:srgbClr val="1E2A24"/>
+                </a:solidFill>
+                <a:latin typeface="Calibri"/>
+              </a:rPr>
+              <a:t>Взрыв — гибель Гуса</a:t>
+            </a:r>
+          </a:p>
+          <a:p>
+            <a:pPr>
+              <a:spcAft>
+                <a:spcPts val="900"/>
+              </a:spcAft>
+            </a:pPr>
+            <a:r>
+              <a:rPr sz="1400" b="1" i="0">
+                <a:solidFill>
+                  <a:srgbClr val="5AA634"/>
+                </a:solidFill>
+                <a:latin typeface="Calibri"/>
+              </a:rPr>
+              <a:t>•  </a:t>
+            </a:r>
+            <a:r>
+              <a:rPr sz="1400" b="0" i="0">
+                <a:solidFill>
+                  <a:srgbClr val="1E2A24"/>
+                </a:solidFill>
+                <a:latin typeface="Calibri"/>
+              </a:rPr>
+              <a:t>Гибель Хэнка</a:t>
+            </a:r>
+          </a:p>
+        </p:txBody>
+      </p:sp>
+      <p:sp>
+        <p:nvSpPr>
+          <p:cNvPr id="11" name="Rounded Rectangle 10"/>
+          <p:cNvSpPr/>
+          <p:nvPr/>
+        </p:nvSpPr>
+        <p:spPr>
+          <a:xfrm>
+            <a:off x="8311896" y="1371600"/>
+            <a:ext cx="3657600" cy="566928"/>
+          </a:xfrm>
+          <a:prstGeom prst="roundRect">
+            <a:avLst/>
+          </a:prstGeom>
+          <a:solidFill>
+            <a:srgbClr val="BFE3B6"/>
+          </a:solidFill>
+          <a:ln w="15240">
+            <a:solidFill>
+              <a:srgbClr val="AAAAAA"/>
+            </a:solidFill>
+          </a:ln>
+          <a:effectLst/>
+        </p:spPr>
+        <p:style>
+          <a:lnRef idx="1">
+            <a:schemeClr val="accent1"/>
+          </a:lnRef>
+          <a:fillRef idx="3">
+            <a:schemeClr val="accent1"/>
+          </a:fillRef>
+          <a:effectRef idx="2">
+            <a:schemeClr val="accent1"/>
+          </a:effectRef>
+          <a:fontRef idx="minor">
+            <a:schemeClr val="lt1"/>
+          </a:fontRef>
+        </p:style>
+        <p:txBody>
+          <a:bodyPr rtlCol="0" anchor="ctr"/>
+          <a:lstStyle/>
+          <a:p>
+            <a:pPr algn="ctr"/>
+            <a:r>
+              <a:rPr sz="1600" b="1" i="0">
+                <a:solidFill>
+                  <a:srgbClr val="1E2A24"/>
+                </a:solidFill>
+                <a:latin typeface="Calibri"/>
+              </a:rPr>
+              <a:t>ДОКАЗАТЕЛЬСТВА</a:t>
+            </a:r>
+          </a:p>
+        </p:txBody>
+      </p:sp>
+      <p:sp>
+        <p:nvSpPr>
+          <p:cNvPr id="12" name="Rounded Rectangle 11"/>
+          <p:cNvSpPr/>
+          <p:nvPr/>
+        </p:nvSpPr>
+        <p:spPr>
+          <a:xfrm>
+            <a:off x="8311896" y="2011680"/>
+            <a:ext cx="3657600" cy="4206240"/>
+          </a:xfrm>
+          <a:prstGeom prst="roundRect">
+            <a:avLst/>
+          </a:prstGeom>
+          <a:solidFill>
+            <a:srgbClr val="F1F5F0"/>
+          </a:solidFill>
+          <a:ln w="15240">
+            <a:solidFill>
+              <a:srgbClr val="DDE5DC"/>
+            </a:solidFill>
+          </a:ln>
+          <a:effectLst/>
+        </p:spPr>
+        <p:style>
+          <a:lnRef idx="1">
+            <a:schemeClr val="accent1"/>
+          </a:lnRef>
+          <a:fillRef idx="3">
+            <a:schemeClr val="accent1"/>
+          </a:fillRef>
+          <a:effectRef idx="2">
+            <a:schemeClr val="accent1"/>
+          </a:effectRef>
+          <a:fontRef idx="minor">
+            <a:schemeClr val="lt1"/>
+          </a:fontRef>
+        </p:style>
+        <p:txBody>
+          <a:bodyPr rtlCol="0" anchor="ctr" wrap="square" lIns="182880" tIns="146304"/>
+          <a:lstStyle/>
+          <a:p>
+            <a:pPr algn="ctr">
+              <a:spcAft>
+                <a:spcPts val="900"/>
+              </a:spcAft>
+            </a:pPr>
+            <a:r>
+              <a:rPr sz="1400" b="1" i="0">
+                <a:solidFill>
+                  <a:srgbClr val="5AA634"/>
+                </a:solidFill>
+                <a:latin typeface="Calibri"/>
+              </a:rPr>
+              <a:t>•  </a:t>
+            </a:r>
+            <a:r>
+              <a:rPr sz="1400" b="0" i="0">
+                <a:solidFill>
+                  <a:srgbClr val="1E2A24"/>
+                </a:solidFill>
+                <a:latin typeface="Calibri"/>
+              </a:rPr>
+              <a:t>Голубой метамфетамин</a:t>
+            </a:r>
+          </a:p>
+          <a:p>
+            <a:pPr>
+              <a:spcAft>
+                <a:spcPts val="900"/>
+              </a:spcAft>
+            </a:pPr>
+            <a:r>
+              <a:rPr sz="1400" b="1" i="0">
+                <a:solidFill>
+                  <a:srgbClr val="5AA634"/>
+                </a:solidFill>
+                <a:latin typeface="Calibri"/>
+              </a:rPr>
+              <a:t>•  </a:t>
+            </a:r>
+            <a:r>
+              <a:rPr sz="1400" b="0" i="0">
+                <a:solidFill>
+                  <a:srgbClr val="1E2A24"/>
+                </a:solidFill>
+                <a:latin typeface="Calibri"/>
+              </a:rPr>
+              <a:t>Книга «Leaves of Grass» («G.B.»)</a:t>
+            </a:r>
+          </a:p>
+          <a:p>
+            <a:pPr>
+              <a:spcAft>
+                <a:spcPts val="900"/>
+              </a:spcAft>
+            </a:pPr>
+            <a:r>
+              <a:rPr sz="1400" b="1" i="0">
+                <a:solidFill>
+                  <a:srgbClr val="5AA634"/>
+                </a:solidFill>
+                <a:latin typeface="Calibri"/>
+              </a:rPr>
+              <a:t>•  </a:t>
+            </a:r>
+            <a:r>
+              <a:rPr sz="1400" b="0" i="0">
+                <a:solidFill>
+                  <a:srgbClr val="1E2A24"/>
+                </a:solidFill>
+                <a:latin typeface="Calibri"/>
+              </a:rPr>
+              <a:t>Рицин (яд)</a:t>
+            </a:r>
+          </a:p>
+          <a:p>
+            <a:pPr>
+              <a:spcAft>
+                <a:spcPts val="900"/>
+              </a:spcAft>
+            </a:pPr>
+            <a:r>
+              <a:rPr sz="1400" b="1" i="0">
+                <a:solidFill>
+                  <a:srgbClr val="5AA634"/>
+                </a:solidFill>
+                <a:latin typeface="Calibri"/>
+              </a:rPr>
+              <a:t>•  </a:t>
+            </a:r>
+            <a:r>
+              <a:rPr sz="1400" b="0" i="0">
+                <a:solidFill>
+                  <a:srgbClr val="1E2A24"/>
+                </a:solidFill>
+                <a:latin typeface="Calibri"/>
+              </a:rPr>
+              <a:t>Суперлаборатория / RV</a:t>
+            </a:r>
+          </a:p>
+          <a:p>
+            <a:pPr>
+              <a:spcAft>
+                <a:spcPts val="900"/>
+              </a:spcAft>
+            </a:pPr>
+            <a:r>
+              <a:rPr sz="1400" b="1" i="0">
+                <a:solidFill>
+                  <a:srgbClr val="5AA634"/>
+                </a:solidFill>
+                <a:latin typeface="Calibri"/>
+              </a:rPr>
+              <a:t>•  </a:t>
+            </a:r>
+            <a:r>
+              <a:rPr sz="1400" b="0" i="0">
+                <a:solidFill>
+                  <a:srgbClr val="1E2A24"/>
+                </a:solidFill>
+                <a:latin typeface="Calibri"/>
+              </a:rPr>
+              <a:t>Метиламин (сырьё)</a:t>
+            </a:r>
+          </a:p>
+          <a:p>
+            <a:pPr>
+              <a:spcAft>
+                <a:spcPts val="900"/>
+              </a:spcAft>
+            </a:pPr>
+            <a:r>
+              <a:rPr sz="1400" b="1" i="0">
+                <a:solidFill>
+                  <a:srgbClr val="5AA634"/>
+                </a:solidFill>
+                <a:latin typeface="Calibri"/>
+              </a:rPr>
+              <a:t>•  </a:t>
+            </a:r>
+            <a:r>
+              <a:rPr sz="1400" b="0" i="0">
+                <a:solidFill>
+                  <a:srgbClr val="1E2A24"/>
+                </a:solidFill>
+                <a:latin typeface="Calibri"/>
+              </a:rPr>
+              <a:t>Деньги / автомойка A1</a:t>
+            </a:r>
+          </a:p>
+        </p:txBody>
+      </p:sp>
+      <p:sp>
+        <p:nvSpPr>
+          <p:cNvPr id="13" name="Rectangle 12"/>
+          <p:cNvSpPr/>
+          <p:nvPr/>
+        </p:nvSpPr>
+        <p:spPr>
+          <a:xfrm>
+            <a:off x="411480" y="6455664"/>
+            <a:ext cx="2926080" cy="27940"/>
+          </a:xfrm>
+          <a:prstGeom prst="rect">
+            <a:avLst/>
+          </a:prstGeom>
+          <a:solidFill>
+            <a:srgbClr val="5AA634"/>
+          </a:solidFill>
+          <a:ln>
+            <a:noFill/>
+          </a:ln>
+          <a:effectLst/>
+        </p:spPr>
+        <p:style>
+          <a:lnRef idx="1">
+            <a:schemeClr val="accent1"/>
+          </a:lnRef>
+          <a:fillRef idx="3">
+            <a:schemeClr val="accent1"/>
+          </a:fillRef>
+          <a:effectRef idx="2">
+            <a:schemeClr val="accent1"/>
+          </a:effectRef>
+          <a:fontRef idx="minor">
+            <a:schemeClr val="lt1"/>
+          </a:fontRef>
+        </p:style>
+        <p:txBody>
+          <a:bodyPr rtlCol="0" anchor="ctr"/>
+          <a:lstStyle/>
+          <a:p>
+            <a:pPr algn="ctr"/>
+          </a:p>
+        </p:txBody>
+      </p:sp>
+      <p:sp>
+        <p:nvSpPr>
+          <p:cNvPr id="14" name="TextBox 13"/>
+          <p:cNvSpPr txBox="1"/>
+          <p:nvPr/>
+        </p:nvSpPr>
+        <p:spPr>
+          <a:xfrm>
+            <a:off x="9875520" y="6355080"/>
+            <a:ext cx="2194560" cy="365760"/>
           </a:xfrm>
           <a:prstGeom prst="rect">
             <a:avLst/>
@@ -4836,13 +7317,13 @@
           <a:p>
             <a:pPr algn="r"/>
             <a:r>
-              <a:rPr sz="1100" b="0" i="0">
-                <a:solidFill>
-                  <a:srgbClr val="555555"/>
-                </a:solidFill>
-                <a:latin typeface="Calibri"/>
-              </a:rPr>
-              <a:t>ЛР №9  •  5</a:t>
+              <a:rPr sz="1000" b="0" i="0">
+                <a:solidFill>
+                  <a:srgbClr val="5B6B63"/>
+                </a:solidFill>
+                <a:latin typeface="Calibri"/>
+              </a:rPr>
+              <a:t>Во все тяжкие · ЛР №9 · 5</a:t>
             </a:r>
           </a:p>
         </p:txBody>
@@ -4882,13 +7363,13 @@
         <p:spPr>
           <a:xfrm>
             <a:off x="0" y="0"/>
-            <a:ext cx="12191695" cy="1051560"/>
+            <a:ext cx="12191695" cy="1024128"/>
           </a:xfrm>
           <a:prstGeom prst="rect">
             <a:avLst/>
           </a:prstGeom>
           <a:solidFill>
-            <a:srgbClr val="1A3C5E"/>
+            <a:srgbClr val="14211A"/>
           </a:solidFill>
           <a:ln>
             <a:noFill/>
@@ -4919,41 +7400,51 @@
       </p:sp>
       <p:sp>
         <p:nvSpPr>
-          <p:cNvPr id="3" name="TextBox 2"/>
-          <p:cNvSpPr txBox="1"/>
-          <p:nvPr/>
-        </p:nvSpPr>
-        <p:spPr>
-          <a:xfrm>
-            <a:off x="457200" y="109728"/>
-            <a:ext cx="11247120" cy="868680"/>
-          </a:xfrm>
-          <a:prstGeom prst="rect">
-            <a:avLst/>
-          </a:prstGeom>
-          <a:noFill/>
-        </p:spPr>
-        <p:txBody>
-          <a:bodyPr wrap="square" anchor="ctr">
-            <a:spAutoFit/>
-          </a:bodyPr>
-          <a:lstStyle/>
-          <a:p>
-            <a:r>
-              <a:rPr sz="3000" b="1" i="0">
-                <a:solidFill>
-                  <a:srgbClr val="FFFFFF"/>
-                </a:solidFill>
-                <a:latin typeface="Calibri"/>
-              </a:rPr>
-              <a:t>Схема преступления в IBM i2 (link-граф связей)</a:t>
-            </a:r>
+          <p:cNvPr id="3" name="Rectangle 2"/>
+          <p:cNvSpPr/>
+          <p:nvPr/>
+        </p:nvSpPr>
+        <p:spPr>
+          <a:xfrm>
+            <a:off x="0" y="0"/>
+            <a:ext cx="164592" cy="1024128"/>
+          </a:xfrm>
+          <a:prstGeom prst="rect">
+            <a:avLst/>
+          </a:prstGeom>
+          <a:solidFill>
+            <a:srgbClr val="5AA634"/>
+          </a:solidFill>
+          <a:ln>
+            <a:noFill/>
+          </a:ln>
+          <a:effectLst/>
+        </p:spPr>
+        <p:style>
+          <a:lnRef idx="1">
+            <a:schemeClr val="accent1"/>
+          </a:lnRef>
+          <a:fillRef idx="3">
+            <a:schemeClr val="accent1"/>
+          </a:fillRef>
+          <a:effectRef idx="2">
+            <a:schemeClr val="accent1"/>
+          </a:effectRef>
+          <a:fontRef idx="minor">
+            <a:schemeClr val="lt1"/>
+          </a:fontRef>
+        </p:style>
+        <p:txBody>
+          <a:bodyPr rtlCol="0" anchor="ctr"/>
+          <a:lstStyle/>
+          <a:p>
+            <a:pPr algn="ctr"/>
           </a:p>
         </p:txBody>
       </p:sp>
       <p:pic>
         <p:nvPicPr>
-          <p:cNvPr id="4" name="Picture 3" descr="scheme.png"/>
+          <p:cNvPr id="4" name="Picture 3" descr="tile_br.png"/>
           <p:cNvPicPr>
             <a:picLocks noChangeAspect="1"/>
           </p:cNvPicPr>
@@ -4967,8 +7458,8 @@
         </p:blipFill>
         <p:spPr>
           <a:xfrm>
-            <a:off x="2236357" y="1143000"/>
-            <a:ext cx="4488405" cy="5486400"/>
+            <a:off x="10927080" y="149448"/>
+            <a:ext cx="731520" cy="725231"/>
           </a:xfrm>
           <a:prstGeom prst="rect">
             <a:avLst/>
@@ -4977,7 +7468,7 @@
       </p:pic>
       <p:pic>
         <p:nvPicPr>
-          <p:cNvPr id="5" name="Picture 4" descr="legend.png"/>
+          <p:cNvPr id="5" name="Picture 4" descr="tile_ba.png"/>
           <p:cNvPicPr>
             <a:picLocks noChangeAspect="1"/>
           </p:cNvPicPr>
@@ -4991,8 +7482,8 @@
         </p:blipFill>
         <p:spPr>
           <a:xfrm>
-            <a:off x="8732520" y="2278796"/>
-            <a:ext cx="3291839" cy="1294567"/>
+            <a:off x="11430000" y="149448"/>
+            <a:ext cx="731520" cy="725231"/>
           </a:xfrm>
           <a:prstGeom prst="rect">
             <a:avLst/>
@@ -5007,8 +7498,110 @@
         </p:nvSpPr>
         <p:spPr>
           <a:xfrm>
-            <a:off x="8732520" y="4480560"/>
-            <a:ext cx="3291840" cy="2103120"/>
+            <a:off x="411480" y="91440"/>
+            <a:ext cx="10241280" cy="868680"/>
+          </a:xfrm>
+          <a:prstGeom prst="rect">
+            <a:avLst/>
+          </a:prstGeom>
+          <a:noFill/>
+        </p:spPr>
+        <p:txBody>
+          <a:bodyPr wrap="square" anchor="ctr">
+            <a:spAutoFit/>
+          </a:bodyPr>
+          <a:lstStyle/>
+          <a:p>
+            <a:r>
+              <a:rPr sz="2800" b="1" i="0">
+                <a:solidFill>
+                  <a:srgbClr val="FFFFFF"/>
+                </a:solidFill>
+                <a:latin typeface="Calibri"/>
+              </a:rPr>
+              <a:t>Хронология ключевых событий</a:t>
+            </a:r>
+          </a:p>
+        </p:txBody>
+      </p:sp>
+      <p:pic>
+        <p:nvPicPr>
+          <p:cNvPr id="7" name="Picture 6" descr="timeline.png"/>
+          <p:cNvPicPr>
+            <a:picLocks noChangeAspect="1"/>
+          </p:cNvPicPr>
+          <p:nvPr/>
+        </p:nvPicPr>
+        <p:blipFill>
+          <a:blip r:embed="rId4"/>
+          <a:stretch>
+            <a:fillRect/>
+          </a:stretch>
+        </p:blipFill>
+        <p:spPr>
+          <a:xfrm>
+            <a:off x="365760" y="1692437"/>
+            <a:ext cx="11430000" cy="4296085"/>
+          </a:xfrm>
+          <a:prstGeom prst="rect">
+            <a:avLst/>
+          </a:prstGeom>
+        </p:spPr>
+      </p:pic>
+      <p:sp>
+        <p:nvSpPr>
+          <p:cNvPr id="8" name="Rectangle 7"/>
+          <p:cNvSpPr/>
+          <p:nvPr/>
+        </p:nvSpPr>
+        <p:spPr>
+          <a:xfrm>
+            <a:off x="411480" y="6455664"/>
+            <a:ext cx="2926080" cy="27940"/>
+          </a:xfrm>
+          <a:prstGeom prst="rect">
+            <a:avLst/>
+          </a:prstGeom>
+          <a:solidFill>
+            <a:srgbClr val="5AA634"/>
+          </a:solidFill>
+          <a:ln>
+            <a:noFill/>
+          </a:ln>
+          <a:effectLst/>
+        </p:spPr>
+        <p:style>
+          <a:lnRef idx="1">
+            <a:schemeClr val="accent1"/>
+          </a:lnRef>
+          <a:fillRef idx="3">
+            <a:schemeClr val="accent1"/>
+          </a:fillRef>
+          <a:effectRef idx="2">
+            <a:schemeClr val="accent1"/>
+          </a:effectRef>
+          <a:fontRef idx="minor">
+            <a:schemeClr val="lt1"/>
+          </a:fontRef>
+        </p:style>
+        <p:txBody>
+          <a:bodyPr rtlCol="0" anchor="ctr"/>
+          <a:lstStyle/>
+          <a:p>
+            <a:pPr algn="ctr"/>
+          </a:p>
+        </p:txBody>
+      </p:sp>
+      <p:sp>
+        <p:nvSpPr>
+          <p:cNvPr id="9" name="TextBox 8"/>
+          <p:cNvSpPr txBox="1"/>
+          <p:nvPr/>
+        </p:nvSpPr>
+        <p:spPr>
+          <a:xfrm>
+            <a:off x="9875520" y="6355080"/>
+            <a:ext cx="2194560" cy="365760"/>
           </a:xfrm>
           <a:prstGeom prst="rect">
             <a:avLst/>
@@ -5021,58 +7614,15 @@
           </a:bodyPr>
           <a:lstStyle/>
           <a:p>
-            <a:r>
-              <a:rPr sz="1200" b="0" i="0">
-                <a:solidFill>
-                  <a:srgbClr val="222222"/>
-                </a:solidFill>
-                <a:latin typeface="Calibri"/>
-              </a:rPr>
-              <a:t>Граф построен в IBM i2 Analyst's Notebook импортом из CSV (23 узла, 36 связей). </a:t>
-            </a:r>
-            <a:r>
-              <a:rPr sz="1200" b="0" i="0">
-                <a:solidFill>
-                  <a:srgbClr val="222222"/>
-                </a:solidFill>
-                <a:latin typeface="Calibri"/>
-              </a:rPr>
-              <a:t>Узлы — сущности, рёбра — связи с подписью характера отношения.</a:t>
-            </a:r>
-          </a:p>
-        </p:txBody>
-      </p:sp>
-      <p:sp>
-        <p:nvSpPr>
-          <p:cNvPr id="7" name="TextBox 6"/>
-          <p:cNvSpPr txBox="1"/>
-          <p:nvPr/>
-        </p:nvSpPr>
-        <p:spPr>
-          <a:xfrm>
-            <a:off x="10332720" y="6446520"/>
-            <a:ext cx="1737360" cy="365760"/>
-          </a:xfrm>
-          <a:prstGeom prst="rect">
-            <a:avLst/>
-          </a:prstGeom>
-          <a:noFill/>
-        </p:spPr>
-        <p:txBody>
-          <a:bodyPr wrap="square">
-            <a:spAutoFit/>
-          </a:bodyPr>
-          <a:lstStyle/>
-          <a:p>
             <a:pPr algn="r"/>
             <a:r>
-              <a:rPr sz="1100" b="0" i="0">
-                <a:solidFill>
-                  <a:srgbClr val="555555"/>
-                </a:solidFill>
-                <a:latin typeface="Calibri"/>
-              </a:rPr>
-              <a:t>ЛР №9  •  6</a:t>
+              <a:rPr sz="1000" b="0" i="0">
+                <a:solidFill>
+                  <a:srgbClr val="5B6B63"/>
+                </a:solidFill>
+                <a:latin typeface="Calibri"/>
+              </a:rPr>
+              <a:t>Во все тяжкие · ЛР №9 · 6</a:t>
             </a:r>
           </a:p>
         </p:txBody>
@@ -5112,13 +7662,13 @@
         <p:spPr>
           <a:xfrm>
             <a:off x="0" y="0"/>
-            <a:ext cx="12191695" cy="1051560"/>
+            <a:ext cx="12191695" cy="1024128"/>
           </a:xfrm>
           <a:prstGeom prst="rect">
             <a:avLst/>
           </a:prstGeom>
           <a:solidFill>
-            <a:srgbClr val="1A3C5E"/>
+            <a:srgbClr val="14211A"/>
           </a:solidFill>
           <a:ln>
             <a:noFill/>
@@ -5149,14 +7699,106 @@
       </p:sp>
       <p:sp>
         <p:nvSpPr>
-          <p:cNvPr id="3" name="TextBox 2"/>
+          <p:cNvPr id="3" name="Rectangle 2"/>
+          <p:cNvSpPr/>
+          <p:nvPr/>
+        </p:nvSpPr>
+        <p:spPr>
+          <a:xfrm>
+            <a:off x="0" y="0"/>
+            <a:ext cx="164592" cy="1024128"/>
+          </a:xfrm>
+          <a:prstGeom prst="rect">
+            <a:avLst/>
+          </a:prstGeom>
+          <a:solidFill>
+            <a:srgbClr val="5AA634"/>
+          </a:solidFill>
+          <a:ln>
+            <a:noFill/>
+          </a:ln>
+          <a:effectLst/>
+        </p:spPr>
+        <p:style>
+          <a:lnRef idx="1">
+            <a:schemeClr val="accent1"/>
+          </a:lnRef>
+          <a:fillRef idx="3">
+            <a:schemeClr val="accent1"/>
+          </a:fillRef>
+          <a:effectRef idx="2">
+            <a:schemeClr val="accent1"/>
+          </a:effectRef>
+          <a:fontRef idx="minor">
+            <a:schemeClr val="lt1"/>
+          </a:fontRef>
+        </p:style>
+        <p:txBody>
+          <a:bodyPr rtlCol="0" anchor="ctr"/>
+          <a:lstStyle/>
+          <a:p>
+            <a:pPr algn="ctr"/>
+          </a:p>
+        </p:txBody>
+      </p:sp>
+      <p:pic>
+        <p:nvPicPr>
+          <p:cNvPr id="4" name="Picture 3" descr="tile_br.png"/>
+          <p:cNvPicPr>
+            <a:picLocks noChangeAspect="1"/>
+          </p:cNvPicPr>
+          <p:nvPr/>
+        </p:nvPicPr>
+        <p:blipFill>
+          <a:blip r:embed="rId2"/>
+          <a:stretch>
+            <a:fillRect/>
+          </a:stretch>
+        </p:blipFill>
+        <p:spPr>
+          <a:xfrm>
+            <a:off x="10927080" y="149448"/>
+            <a:ext cx="731520" cy="725231"/>
+          </a:xfrm>
+          <a:prstGeom prst="rect">
+            <a:avLst/>
+          </a:prstGeom>
+        </p:spPr>
+      </p:pic>
+      <p:pic>
+        <p:nvPicPr>
+          <p:cNvPr id="5" name="Picture 4" descr="tile_ba.png"/>
+          <p:cNvPicPr>
+            <a:picLocks noChangeAspect="1"/>
+          </p:cNvPicPr>
+          <p:nvPr/>
+        </p:nvPicPr>
+        <p:blipFill>
+          <a:blip r:embed="rId3"/>
+          <a:stretch>
+            <a:fillRect/>
+          </a:stretch>
+        </p:blipFill>
+        <p:spPr>
+          <a:xfrm>
+            <a:off x="11430000" y="149448"/>
+            <a:ext cx="731520" cy="725231"/>
+          </a:xfrm>
+          <a:prstGeom prst="rect">
+            <a:avLst/>
+          </a:prstGeom>
+        </p:spPr>
+      </p:pic>
+      <p:sp>
+        <p:nvSpPr>
+          <p:cNvPr id="6" name="TextBox 5"/>
           <p:cNvSpPr txBox="1"/>
           <p:nvPr/>
         </p:nvSpPr>
         <p:spPr>
           <a:xfrm>
-            <a:off x="457200" y="109728"/>
-            <a:ext cx="11247120" cy="868680"/>
+            <a:off x="411480" y="91440"/>
+            <a:ext cx="10241280" cy="868680"/>
           </a:xfrm>
           <a:prstGeom prst="rect">
             <a:avLst/>
@@ -5170,27 +7812,75 @@
           <a:lstStyle/>
           <a:p>
             <a:r>
-              <a:rPr sz="3000" b="1" i="0">
+              <a:rPr sz="2800" b="1" i="0">
                 <a:solidFill>
                   <a:srgbClr val="FFFFFF"/>
                 </a:solidFill>
                 <a:latin typeface="Calibri"/>
               </a:rPr>
-              <a:t>Разбор ключевых связей · ядро группы</a:t>
-            </a:r>
-          </a:p>
-        </p:txBody>
-      </p:sp>
-      <p:sp>
-        <p:nvSpPr>
-          <p:cNvPr id="4" name="TextBox 3"/>
+              <a:t>Схема преступления — круговой граф (IBM i2)</a:t>
+            </a:r>
+          </a:p>
+        </p:txBody>
+      </p:sp>
+      <p:pic>
+        <p:nvPicPr>
+          <p:cNvPr id="7" name="Picture 6" descr="scheme_circular.png"/>
+          <p:cNvPicPr>
+            <a:picLocks noChangeAspect="1"/>
+          </p:cNvPicPr>
+          <p:nvPr/>
+        </p:nvPicPr>
+        <p:blipFill>
+          <a:blip r:embed="rId4"/>
+          <a:stretch>
+            <a:fillRect/>
+          </a:stretch>
+        </p:blipFill>
+        <p:spPr>
+          <a:xfrm>
+            <a:off x="1158236" y="1097280"/>
+            <a:ext cx="6644647" cy="5532120"/>
+          </a:xfrm>
+          <a:prstGeom prst="rect">
+            <a:avLst/>
+          </a:prstGeom>
+        </p:spPr>
+      </p:pic>
+      <p:pic>
+        <p:nvPicPr>
+          <p:cNvPr id="8" name="Picture 7" descr="legend.png"/>
+          <p:cNvPicPr>
+            <a:picLocks noChangeAspect="1"/>
+          </p:cNvPicPr>
+          <p:nvPr/>
+        </p:nvPicPr>
+        <p:blipFill>
+          <a:blip r:embed="rId5"/>
+          <a:stretch>
+            <a:fillRect/>
+          </a:stretch>
+        </p:blipFill>
+        <p:spPr>
+          <a:xfrm>
+            <a:off x="8686800" y="2123656"/>
+            <a:ext cx="3383280" cy="1330527"/>
+          </a:xfrm>
+          <a:prstGeom prst="rect">
+            <a:avLst/>
+          </a:prstGeom>
+        </p:spPr>
+      </p:pic>
+      <p:sp>
+        <p:nvSpPr>
+          <p:cNvPr id="9" name="TextBox 8"/>
           <p:cNvSpPr txBox="1"/>
           <p:nvPr/>
         </p:nvSpPr>
         <p:spPr>
           <a:xfrm>
-            <a:off x="640080" y="1463040"/>
-            <a:ext cx="10972800" cy="4937760"/>
+            <a:off x="8686800" y="4389120"/>
+            <a:ext cx="3383280" cy="2103120"/>
           </a:xfrm>
           <a:prstGeom prst="rect">
             <a:avLst/>
@@ -5203,113 +7893,72 @@
           </a:bodyPr>
           <a:lstStyle/>
           <a:p>
-            <a:pPr>
-              <a:spcAft>
-                <a:spcPts val="1300"/>
-              </a:spcAft>
-            </a:pPr>
-            <a:r>
-              <a:rPr sz="1900" b="1" i="0">
-                <a:solidFill>
-                  <a:srgbClr val="1A3C5E"/>
-                </a:solidFill>
-                <a:latin typeface="Calibri"/>
-              </a:rPr>
-              <a:t>• Уолт ⇄ Джесси — партнёры по производству; центральная связь всей сети.</a:t>
-            </a:r>
-          </a:p>
-          <a:p>
-            <a:pPr>
-              <a:spcAft>
-                <a:spcPts val="1300"/>
-              </a:spcAft>
-            </a:pPr>
-            <a:r>
-              <a:rPr sz="1900" b="0" i="0">
-                <a:solidFill>
-                  <a:srgbClr val="222222"/>
-                </a:solidFill>
-                <a:latin typeface="Calibri"/>
-              </a:rPr>
-              <a:t>• Уолт ⇄ Скайлер — брак; жена легализует доходы через автомойку A1.</a:t>
-            </a:r>
-          </a:p>
-          <a:p>
-            <a:pPr>
-              <a:spcAft>
-                <a:spcPts val="1300"/>
-              </a:spcAft>
-            </a:pPr>
-            <a:r>
-              <a:rPr sz="1900" b="0" i="0">
-                <a:solidFill>
-                  <a:srgbClr val="222222"/>
-                </a:solidFill>
-                <a:latin typeface="Calibri"/>
-              </a:rPr>
-              <a:t>• Уолт ⇄ Сол Гудман — адвокат-«прикрытие», связывает Уолта с Майком и теневой логистикой.</a:t>
-            </a:r>
-          </a:p>
-          <a:p>
-            <a:pPr>
-              <a:spcAft>
-                <a:spcPts val="1300"/>
-              </a:spcAft>
-            </a:pPr>
-            <a:r>
-              <a:rPr sz="1900" b="0" i="0">
-                <a:solidFill>
-                  <a:srgbClr val="222222"/>
-                </a:solidFill>
-                <a:latin typeface="Calibri"/>
-              </a:rPr>
-              <a:t>• Уолт ⇄ Гус Фринг — Уолт нанят как повар; Гус обеспечивает сбыт через сеть Los Pollos Hermanos.</a:t>
-            </a:r>
-          </a:p>
-          <a:p>
-            <a:pPr>
-              <a:spcAft>
-                <a:spcPts val="1300"/>
-              </a:spcAft>
-            </a:pPr>
-            <a:r>
-              <a:rPr sz="1900" b="0" i="0">
-                <a:solidFill>
-                  <a:srgbClr val="222222"/>
-                </a:solidFill>
-                <a:latin typeface="Calibri"/>
-              </a:rPr>
-              <a:t>• Гус → Майк, Лидия — охрана и поставки метиламина (сырьё → производство).</a:t>
-            </a:r>
-          </a:p>
-          <a:p>
-            <a:pPr>
-              <a:spcAft>
-                <a:spcPts val="1300"/>
-              </a:spcAft>
-            </a:pPr>
-            <a:r>
-              <a:rPr sz="1900" b="1" i="0">
-                <a:solidFill>
-                  <a:srgbClr val="2E7D32"/>
-                </a:solidFill>
-                <a:latin typeface="Calibri"/>
-              </a:rPr>
-              <a:t>• Вывод: преступление держится не на одном человеке, а на устойчивой сети ролей.</a:t>
-            </a:r>
-          </a:p>
-        </p:txBody>
-      </p:sp>
-      <p:sp>
-        <p:nvSpPr>
-          <p:cNvPr id="5" name="TextBox 4"/>
+            <a:r>
+              <a:rPr sz="1200" b="0" i="0">
+                <a:solidFill>
+                  <a:srgbClr val="1E2A24"/>
+                </a:solidFill>
+                <a:latin typeface="Calibri"/>
+              </a:rPr>
+              <a:t>23 узла и 36 связей. Все сущности соединены в единую сеть; узлы расположены по кругу, связи проходят внутри.</a:t>
+            </a:r>
+          </a:p>
+        </p:txBody>
+      </p:sp>
+      <p:sp>
+        <p:nvSpPr>
+          <p:cNvPr id="10" name="Rectangle 9"/>
+          <p:cNvSpPr/>
+          <p:nvPr/>
+        </p:nvSpPr>
+        <p:spPr>
+          <a:xfrm>
+            <a:off x="411480" y="6455664"/>
+            <a:ext cx="2926080" cy="27940"/>
+          </a:xfrm>
+          <a:prstGeom prst="rect">
+            <a:avLst/>
+          </a:prstGeom>
+          <a:solidFill>
+            <a:srgbClr val="5AA634"/>
+          </a:solidFill>
+          <a:ln>
+            <a:noFill/>
+          </a:ln>
+          <a:effectLst/>
+        </p:spPr>
+        <p:style>
+          <a:lnRef idx="1">
+            <a:schemeClr val="accent1"/>
+          </a:lnRef>
+          <a:fillRef idx="3">
+            <a:schemeClr val="accent1"/>
+          </a:fillRef>
+          <a:effectRef idx="2">
+            <a:schemeClr val="accent1"/>
+          </a:effectRef>
+          <a:fontRef idx="minor">
+            <a:schemeClr val="lt1"/>
+          </a:fontRef>
+        </p:style>
+        <p:txBody>
+          <a:bodyPr rtlCol="0" anchor="ctr"/>
+          <a:lstStyle/>
+          <a:p>
+            <a:pPr algn="ctr"/>
+          </a:p>
+        </p:txBody>
+      </p:sp>
+      <p:sp>
+        <p:nvSpPr>
+          <p:cNvPr id="11" name="TextBox 10"/>
           <p:cNvSpPr txBox="1"/>
           <p:nvPr/>
         </p:nvSpPr>
         <p:spPr>
           <a:xfrm>
-            <a:off x="10332720" y="6446520"/>
-            <a:ext cx="1737360" cy="365760"/>
+            <a:off x="9875520" y="6355080"/>
+            <a:ext cx="2194560" cy="365760"/>
           </a:xfrm>
           <a:prstGeom prst="rect">
             <a:avLst/>
@@ -5324,13 +7973,13 @@
           <a:p>
             <a:pPr algn="r"/>
             <a:r>
-              <a:rPr sz="1100" b="0" i="0">
-                <a:solidFill>
-                  <a:srgbClr val="555555"/>
-                </a:solidFill>
-                <a:latin typeface="Calibri"/>
-              </a:rPr>
-              <a:t>ЛР №9  •  7</a:t>
+              <a:rPr sz="1000" b="0" i="0">
+                <a:solidFill>
+                  <a:srgbClr val="5B6B63"/>
+                </a:solidFill>
+                <a:latin typeface="Calibri"/>
+              </a:rPr>
+              <a:t>Во все тяжкие · ЛР №9 · 7</a:t>
             </a:r>
           </a:p>
         </p:txBody>
@@ -5370,13 +8019,13 @@
         <p:spPr>
           <a:xfrm>
             <a:off x="0" y="0"/>
-            <a:ext cx="12191695" cy="1051560"/>
+            <a:ext cx="12191695" cy="1024128"/>
           </a:xfrm>
           <a:prstGeom prst="rect">
             <a:avLst/>
           </a:prstGeom>
           <a:solidFill>
-            <a:srgbClr val="1A3C5E"/>
+            <a:srgbClr val="14211A"/>
           </a:solidFill>
           <a:ln>
             <a:noFill/>
@@ -5407,14 +8056,106 @@
       </p:sp>
       <p:sp>
         <p:nvSpPr>
-          <p:cNvPr id="3" name="TextBox 2"/>
+          <p:cNvPr id="3" name="Rectangle 2"/>
+          <p:cNvSpPr/>
+          <p:nvPr/>
+        </p:nvSpPr>
+        <p:spPr>
+          <a:xfrm>
+            <a:off x="0" y="0"/>
+            <a:ext cx="164592" cy="1024128"/>
+          </a:xfrm>
+          <a:prstGeom prst="rect">
+            <a:avLst/>
+          </a:prstGeom>
+          <a:solidFill>
+            <a:srgbClr val="5AA634"/>
+          </a:solidFill>
+          <a:ln>
+            <a:noFill/>
+          </a:ln>
+          <a:effectLst/>
+        </p:spPr>
+        <p:style>
+          <a:lnRef idx="1">
+            <a:schemeClr val="accent1"/>
+          </a:lnRef>
+          <a:fillRef idx="3">
+            <a:schemeClr val="accent1"/>
+          </a:fillRef>
+          <a:effectRef idx="2">
+            <a:schemeClr val="accent1"/>
+          </a:effectRef>
+          <a:fontRef idx="minor">
+            <a:schemeClr val="lt1"/>
+          </a:fontRef>
+        </p:style>
+        <p:txBody>
+          <a:bodyPr rtlCol="0" anchor="ctr"/>
+          <a:lstStyle/>
+          <a:p>
+            <a:pPr algn="ctr"/>
+          </a:p>
+        </p:txBody>
+      </p:sp>
+      <p:pic>
+        <p:nvPicPr>
+          <p:cNvPr id="4" name="Picture 3" descr="tile_br.png"/>
+          <p:cNvPicPr>
+            <a:picLocks noChangeAspect="1"/>
+          </p:cNvPicPr>
+          <p:nvPr/>
+        </p:nvPicPr>
+        <p:blipFill>
+          <a:blip r:embed="rId2"/>
+          <a:stretch>
+            <a:fillRect/>
+          </a:stretch>
+        </p:blipFill>
+        <p:spPr>
+          <a:xfrm>
+            <a:off x="10927080" y="149448"/>
+            <a:ext cx="731520" cy="725231"/>
+          </a:xfrm>
+          <a:prstGeom prst="rect">
+            <a:avLst/>
+          </a:prstGeom>
+        </p:spPr>
+      </p:pic>
+      <p:pic>
+        <p:nvPicPr>
+          <p:cNvPr id="5" name="Picture 4" descr="tile_ba.png"/>
+          <p:cNvPicPr>
+            <a:picLocks noChangeAspect="1"/>
+          </p:cNvPicPr>
+          <p:nvPr/>
+        </p:nvPicPr>
+        <p:blipFill>
+          <a:blip r:embed="rId3"/>
+          <a:stretch>
+            <a:fillRect/>
+          </a:stretch>
+        </p:blipFill>
+        <p:spPr>
+          <a:xfrm>
+            <a:off x="11430000" y="149448"/>
+            <a:ext cx="731520" cy="725231"/>
+          </a:xfrm>
+          <a:prstGeom prst="rect">
+            <a:avLst/>
+          </a:prstGeom>
+        </p:spPr>
+      </p:pic>
+      <p:sp>
+        <p:nvSpPr>
+          <p:cNvPr id="6" name="TextBox 5"/>
           <p:cNvSpPr txBox="1"/>
           <p:nvPr/>
         </p:nvSpPr>
         <p:spPr>
           <a:xfrm>
-            <a:off x="457200" y="109728"/>
-            <a:ext cx="11247120" cy="868680"/>
+            <a:off x="411480" y="91440"/>
+            <a:ext cx="10241280" cy="868680"/>
           </a:xfrm>
           <a:prstGeom prst="rect">
             <a:avLst/>
@@ -5428,27 +8169,27 @@
           <a:lstStyle/>
           <a:p>
             <a:r>
-              <a:rPr sz="3000" b="1" i="0">
+              <a:rPr sz="2800" b="1" i="0">
                 <a:solidFill>
                   <a:srgbClr val="FFFFFF"/>
                 </a:solidFill>
                 <a:latin typeface="Calibri"/>
               </a:rPr>
-              <a:t>Разбор ключевых связей · улики и расследование</a:t>
-            </a:r>
-          </a:p>
-        </p:txBody>
-      </p:sp>
-      <p:sp>
-        <p:nvSpPr>
-          <p:cNvPr id="4" name="TextBox 3"/>
+              <a:t>Разбор ключевых связей</a:t>
+            </a:r>
+          </a:p>
+        </p:txBody>
+      </p:sp>
+      <p:sp>
+        <p:nvSpPr>
+          <p:cNvPr id="7" name="TextBox 6"/>
           <p:cNvSpPr txBox="1"/>
           <p:nvPr/>
         </p:nvSpPr>
         <p:spPr>
           <a:xfrm>
-            <a:off x="640080" y="1463040"/>
-            <a:ext cx="10972800" cy="4937760"/>
+            <a:off x="640080" y="1417320"/>
+            <a:ext cx="10972800" cy="4754880"/>
           </a:xfrm>
           <a:prstGeom prst="rect">
             <a:avLst/>
@@ -5469,11 +8210,20 @@
             <a:r>
               <a:rPr sz="1800" b="1" i="0">
                 <a:solidFill>
-                  <a:srgbClr val="C01C28"/>
-                </a:solidFill>
-                <a:latin typeface="Calibri"/>
-              </a:rPr>
-              <a:t>• «Голубой метамфетамин» — фирменная улика: именно она выводит DEA на след «Хайзенберга».</a:t>
+                  <a:srgbClr val="5AA634"/>
+                </a:solidFill>
+                <a:latin typeface="Calibri"/>
+              </a:rPr>
+              <a:t>●  </a:t>
+            </a:r>
+            <a:r>
+              <a:rPr sz="1800" b="1" i="0">
+                <a:solidFill>
+                  <a:srgbClr val="3E7A24"/>
+                </a:solidFill>
+                <a:latin typeface="Calibri"/>
+              </a:rPr>
+              <a:t>Уолт ⇄ Джесси — ядро сети: партнёры по производству.</a:t>
             </a:r>
           </a:p>
           <a:p>
@@ -5485,11 +8235,20 @@
             <a:r>
               <a:rPr sz="1800" b="1" i="0">
                 <a:solidFill>
-                  <a:srgbClr val="C01C28"/>
-                </a:solidFill>
-                <a:latin typeface="Calibri"/>
-              </a:rPr>
-              <a:t>• Книга «Leaves of Grass» с надписью «G.B.» (Гейл Боттикер) — ключевое доказательство: по ней Хэнк понимает, что Уолт и есть Хайзенберг.</a:t>
+                  <a:srgbClr val="5AA634"/>
+                </a:solidFill>
+                <a:latin typeface="Calibri"/>
+              </a:rPr>
+              <a:t>●  </a:t>
+            </a:r>
+            <a:r>
+              <a:rPr sz="1800" b="0" i="0">
+                <a:solidFill>
+                  <a:srgbClr val="1E2A24"/>
+                </a:solidFill>
+                <a:latin typeface="Calibri"/>
+              </a:rPr>
+              <a:t>Уолт ⇄ Гус Фринг — наём «повара» и канал сбыта (Los Pollos Hermanos); Майк и Лидия обеспечивают охрану и сырьё.</a:t>
             </a:r>
           </a:p>
           <a:p>
@@ -5499,13 +8258,22 @@
               </a:spcAft>
             </a:pPr>
             <a:r>
-              <a:rPr sz="1800" b="0" i="0">
-                <a:solidFill>
-                  <a:srgbClr val="222222"/>
-                </a:solidFill>
-                <a:latin typeface="Calibri"/>
-              </a:rPr>
-              <a:t>• Рицин — орудие отравления Брока; инструмент манипуляции Джесси (Уолт подставляет Гуса).</a:t>
+              <a:rPr sz="1800" b="1" i="0">
+                <a:solidFill>
+                  <a:srgbClr val="5AA634"/>
+                </a:solidFill>
+                <a:latin typeface="Calibri"/>
+              </a:rPr>
+              <a:t>●  </a:t>
+            </a:r>
+            <a:r>
+              <a:rPr sz="1800" b="1" i="0">
+                <a:solidFill>
+                  <a:srgbClr val="C0392B"/>
+                </a:solidFill>
+                <a:latin typeface="Calibri"/>
+              </a:rPr>
+              <a:t>«Голубой мет» — фирменная улика, выводит DEA на след «Хайзенберга».</a:t>
             </a:r>
           </a:p>
           <a:p>
@@ -5515,13 +8283,22 @@
               </a:spcAft>
             </a:pPr>
             <a:r>
-              <a:rPr sz="1800" b="0" i="0">
-                <a:solidFill>
-                  <a:srgbClr val="222222"/>
-                </a:solidFill>
-                <a:latin typeface="Calibri"/>
-              </a:rPr>
-              <a:t>• Линия DEA (золотая): Хэнк ⇄ Уолт — родство (зять) + расследование; косвенные связи долго маскируют истину.</a:t>
+              <a:rPr sz="1800" b="1" i="0">
+                <a:solidFill>
+                  <a:srgbClr val="5AA634"/>
+                </a:solidFill>
+                <a:latin typeface="Calibri"/>
+              </a:rPr>
+              <a:t>●  </a:t>
+            </a:r>
+            <a:r>
+              <a:rPr sz="1800" b="1" i="0">
+                <a:solidFill>
+                  <a:srgbClr val="C0392B"/>
+                </a:solidFill>
+                <a:latin typeface="Calibri"/>
+              </a:rPr>
+              <a:t>Книга «Leaves of Grass» с надписью «G.B.» — ключевое доказательство: Хэнк понимает, кто такой Хайзенберг.</a:t>
             </a:r>
           </a:p>
           <a:p>
@@ -5531,27 +8308,105 @@
               </a:spcAft>
             </a:pPr>
             <a:r>
+              <a:rPr sz="1800" b="1" i="0">
+                <a:solidFill>
+                  <a:srgbClr val="5AA634"/>
+                </a:solidFill>
+                <a:latin typeface="Calibri"/>
+              </a:rPr>
+              <a:t>●  </a:t>
+            </a:r>
+            <a:r>
               <a:rPr sz="1800" b="0" i="0">
                 <a:solidFill>
-                  <a:srgbClr val="222222"/>
-                </a:solidFill>
-                <a:latin typeface="Calibri"/>
-              </a:rPr>
-              <a:t>• Красные связи ведут к насилию: убийство Гейла, взрыв (гибель Гуса), гибель Хэнка.</a:t>
-            </a:r>
-          </a:p>
-        </p:txBody>
-      </p:sp>
-      <p:sp>
-        <p:nvSpPr>
-          <p:cNvPr id="5" name="TextBox 4"/>
+                  <a:srgbClr val="1E2A24"/>
+                </a:solidFill>
+                <a:latin typeface="Calibri"/>
+              </a:rPr>
+              <a:t>Рицин — орудие отравления Брока и инструмент манипуляции Джесси.</a:t>
+            </a:r>
+          </a:p>
+          <a:p>
+            <a:pPr>
+              <a:spcAft>
+                <a:spcPts val="1300"/>
+              </a:spcAft>
+            </a:pPr>
+            <a:r>
+              <a:rPr sz="1800" b="1" i="0">
+                <a:solidFill>
+                  <a:srgbClr val="5AA634"/>
+                </a:solidFill>
+                <a:latin typeface="Calibri"/>
+              </a:rPr>
+              <a:t>●  </a:t>
+            </a:r>
+            <a:r>
+              <a:rPr sz="1800" b="0" i="0">
+                <a:solidFill>
+                  <a:srgbClr val="1E2A24"/>
+                </a:solidFill>
+                <a:latin typeface="Calibri"/>
+              </a:rPr>
+              <a:t>Красные связи ведут к насилию: убийство Гейла, взрыв (гибель Гуса), гибель Хэнка.</a:t>
+            </a:r>
+          </a:p>
+        </p:txBody>
+      </p:sp>
+      <p:sp>
+        <p:nvSpPr>
+          <p:cNvPr id="8" name="Rectangle 7"/>
+          <p:cNvSpPr/>
+          <p:nvPr/>
+        </p:nvSpPr>
+        <p:spPr>
+          <a:xfrm>
+            <a:off x="411480" y="6455664"/>
+            <a:ext cx="2926080" cy="27940"/>
+          </a:xfrm>
+          <a:prstGeom prst="rect">
+            <a:avLst/>
+          </a:prstGeom>
+          <a:solidFill>
+            <a:srgbClr val="5AA634"/>
+          </a:solidFill>
+          <a:ln>
+            <a:noFill/>
+          </a:ln>
+          <a:effectLst/>
+        </p:spPr>
+        <p:style>
+          <a:lnRef idx="1">
+            <a:schemeClr val="accent1"/>
+          </a:lnRef>
+          <a:fillRef idx="3">
+            <a:schemeClr val="accent1"/>
+          </a:fillRef>
+          <a:effectRef idx="2">
+            <a:schemeClr val="accent1"/>
+          </a:effectRef>
+          <a:fontRef idx="minor">
+            <a:schemeClr val="lt1"/>
+          </a:fontRef>
+        </p:style>
+        <p:txBody>
+          <a:bodyPr rtlCol="0" anchor="ctr"/>
+          <a:lstStyle/>
+          <a:p>
+            <a:pPr algn="ctr"/>
+          </a:p>
+        </p:txBody>
+      </p:sp>
+      <p:sp>
+        <p:nvSpPr>
+          <p:cNvPr id="9" name="TextBox 8"/>
           <p:cNvSpPr txBox="1"/>
           <p:nvPr/>
         </p:nvSpPr>
         <p:spPr>
           <a:xfrm>
-            <a:off x="10332720" y="6446520"/>
-            <a:ext cx="1737360" cy="365760"/>
+            <a:off x="9875520" y="6355080"/>
+            <a:ext cx="2194560" cy="365760"/>
           </a:xfrm>
           <a:prstGeom prst="rect">
             <a:avLst/>
@@ -5566,13 +8421,13 @@
           <a:p>
             <a:pPr algn="r"/>
             <a:r>
-              <a:rPr sz="1100" b="0" i="0">
-                <a:solidFill>
-                  <a:srgbClr val="555555"/>
-                </a:solidFill>
-                <a:latin typeface="Calibri"/>
-              </a:rPr>
-              <a:t>ЛР №9  •  8</a:t>
+              <a:rPr sz="1000" b="0" i="0">
+                <a:solidFill>
+                  <a:srgbClr val="5B6B63"/>
+                </a:solidFill>
+                <a:latin typeface="Calibri"/>
+              </a:rPr>
+              <a:t>Во все тяжкие · ЛР №9 · 8</a:t>
             </a:r>
           </a:p>
         </p:txBody>
@@ -5612,13 +8467,13 @@
         <p:spPr>
           <a:xfrm>
             <a:off x="0" y="0"/>
-            <a:ext cx="12191695" cy="1051560"/>
+            <a:ext cx="12191695" cy="1024128"/>
           </a:xfrm>
           <a:prstGeom prst="rect">
             <a:avLst/>
           </a:prstGeom>
           <a:solidFill>
-            <a:srgbClr val="1A3C5E"/>
+            <a:srgbClr val="14211A"/>
           </a:solidFill>
           <a:ln>
             <a:noFill/>
@@ -5649,14 +8504,106 @@
       </p:sp>
       <p:sp>
         <p:nvSpPr>
-          <p:cNvPr id="3" name="TextBox 2"/>
+          <p:cNvPr id="3" name="Rectangle 2"/>
+          <p:cNvSpPr/>
+          <p:nvPr/>
+        </p:nvSpPr>
+        <p:spPr>
+          <a:xfrm>
+            <a:off x="0" y="0"/>
+            <a:ext cx="164592" cy="1024128"/>
+          </a:xfrm>
+          <a:prstGeom prst="rect">
+            <a:avLst/>
+          </a:prstGeom>
+          <a:solidFill>
+            <a:srgbClr val="5AA634"/>
+          </a:solidFill>
+          <a:ln>
+            <a:noFill/>
+          </a:ln>
+          <a:effectLst/>
+        </p:spPr>
+        <p:style>
+          <a:lnRef idx="1">
+            <a:schemeClr val="accent1"/>
+          </a:lnRef>
+          <a:fillRef idx="3">
+            <a:schemeClr val="accent1"/>
+          </a:fillRef>
+          <a:effectRef idx="2">
+            <a:schemeClr val="accent1"/>
+          </a:effectRef>
+          <a:fontRef idx="minor">
+            <a:schemeClr val="lt1"/>
+          </a:fontRef>
+        </p:style>
+        <p:txBody>
+          <a:bodyPr rtlCol="0" anchor="ctr"/>
+          <a:lstStyle/>
+          <a:p>
+            <a:pPr algn="ctr"/>
+          </a:p>
+        </p:txBody>
+      </p:sp>
+      <p:pic>
+        <p:nvPicPr>
+          <p:cNvPr id="4" name="Picture 3" descr="tile_br.png"/>
+          <p:cNvPicPr>
+            <a:picLocks noChangeAspect="1"/>
+          </p:cNvPicPr>
+          <p:nvPr/>
+        </p:nvPicPr>
+        <p:blipFill>
+          <a:blip r:embed="rId2"/>
+          <a:stretch>
+            <a:fillRect/>
+          </a:stretch>
+        </p:blipFill>
+        <p:spPr>
+          <a:xfrm>
+            <a:off x="10927080" y="149448"/>
+            <a:ext cx="731520" cy="725231"/>
+          </a:xfrm>
+          <a:prstGeom prst="rect">
+            <a:avLst/>
+          </a:prstGeom>
+        </p:spPr>
+      </p:pic>
+      <p:pic>
+        <p:nvPicPr>
+          <p:cNvPr id="5" name="Picture 4" descr="tile_ba.png"/>
+          <p:cNvPicPr>
+            <a:picLocks noChangeAspect="1"/>
+          </p:cNvPicPr>
+          <p:nvPr/>
+        </p:nvPicPr>
+        <p:blipFill>
+          <a:blip r:embed="rId3"/>
+          <a:stretch>
+            <a:fillRect/>
+          </a:stretch>
+        </p:blipFill>
+        <p:spPr>
+          <a:xfrm>
+            <a:off x="11430000" y="149448"/>
+            <a:ext cx="731520" cy="725231"/>
+          </a:xfrm>
+          <a:prstGeom prst="rect">
+            <a:avLst/>
+          </a:prstGeom>
+        </p:spPr>
+      </p:pic>
+      <p:sp>
+        <p:nvSpPr>
+          <p:cNvPr id="6" name="TextBox 5"/>
           <p:cNvSpPr txBox="1"/>
           <p:nvPr/>
         </p:nvSpPr>
         <p:spPr>
           <a:xfrm>
-            <a:off x="457200" y="109728"/>
-            <a:ext cx="11247120" cy="868680"/>
+            <a:off x="411480" y="91440"/>
+            <a:ext cx="10241280" cy="868680"/>
           </a:xfrm>
           <a:prstGeom prst="rect">
             <a:avLst/>
@@ -5670,7 +8617,7 @@
           <a:lstStyle/>
           <a:p>
             <a:r>
-              <a:rPr sz="3000" b="1" i="0">
+              <a:rPr sz="2800" b="1" i="0">
                 <a:solidFill>
                   <a:srgbClr val="FFFFFF"/>
                 </a:solidFill>
@@ -5683,14 +8630,14 @@
       </p:sp>
       <p:sp>
         <p:nvSpPr>
-          <p:cNvPr id="4" name="TextBox 3"/>
+          <p:cNvPr id="7" name="TextBox 6"/>
           <p:cNvSpPr txBox="1"/>
           <p:nvPr/>
         </p:nvSpPr>
         <p:spPr>
           <a:xfrm>
             <a:off x="640080" y="1417320"/>
-            <a:ext cx="10972800" cy="4937760"/>
+            <a:ext cx="10972800" cy="4754880"/>
           </a:xfrm>
           <a:prstGeom prst="rect">
             <a:avLst/>
@@ -5705,111 +8652,184 @@
           <a:p>
             <a:pPr>
               <a:spcAft>
-                <a:spcPts val="1100"/>
+                <a:spcPts val="1300"/>
               </a:spcAft>
             </a:pPr>
             <a:r>
               <a:rPr sz="1800" b="1" i="0">
                 <a:solidFill>
-                  <a:srgbClr val="1A3C5E"/>
-                </a:solidFill>
-                <a:latin typeface="Calibri"/>
-              </a:rPr>
-              <a:t>• Логика связей замкнута и непротиворечива: каждое преступление имеет мотив, исполнителя и улику.</a:t>
+                  <a:srgbClr val="5AA634"/>
+                </a:solidFill>
+                <a:latin typeface="Calibri"/>
+              </a:rPr>
+              <a:t>●  </a:t>
+            </a:r>
+            <a:r>
+              <a:rPr sz="1800" b="1" i="0">
+                <a:solidFill>
+                  <a:srgbClr val="3E7A24"/>
+                </a:solidFill>
+                <a:latin typeface="Calibri"/>
+              </a:rPr>
+              <a:t>Логика связей непротиворечива: у каждого преступления есть мотив, исполнитель и улика.</a:t>
             </a:r>
           </a:p>
           <a:p>
             <a:pPr>
               <a:spcAft>
-                <a:spcPts val="1100"/>
+                <a:spcPts val="1300"/>
               </a:spcAft>
             </a:pPr>
             <a:r>
+              <a:rPr sz="1800" b="1" i="0">
+                <a:solidFill>
+                  <a:srgbClr val="5AA634"/>
+                </a:solidFill>
+                <a:latin typeface="Calibri"/>
+              </a:rPr>
+              <a:t>●  </a:t>
+            </a:r>
+            <a:r>
               <a:rPr sz="1800" b="0" i="0">
                 <a:solidFill>
-                  <a:srgbClr val="222222"/>
-                </a:solidFill>
-                <a:latin typeface="Calibri"/>
-              </a:rPr>
-              <a:t>• Косвенные связи (пунктир) — самые опасные для следствия: родство Хэнк↔Уолт маскирует подозреваемого.</a:t>
+                  <a:srgbClr val="1E2A24"/>
+                </a:solidFill>
+                <a:latin typeface="Calibri"/>
+              </a:rPr>
+              <a:t>Косвенные связи (пунктир) — самые опасные для следствия: родство Хэнк↔Уолт долго маскирует подозреваемого.</a:t>
             </a:r>
           </a:p>
           <a:p>
             <a:pPr>
               <a:spcAft>
-                <a:spcPts val="1100"/>
+                <a:spcPts val="1300"/>
               </a:spcAft>
             </a:pPr>
             <a:r>
+              <a:rPr sz="1800" b="1" i="0">
+                <a:solidFill>
+                  <a:srgbClr val="5AA634"/>
+                </a:solidFill>
+                <a:latin typeface="Calibri"/>
+              </a:rPr>
+              <a:t>●  </a:t>
+            </a:r>
+            <a:r>
               <a:rPr sz="1800" b="0" i="0">
                 <a:solidFill>
-                  <a:srgbClr val="222222"/>
-                </a:solidFill>
-                <a:latin typeface="Calibri"/>
-              </a:rPr>
-              <a:t>• Уязвимая точка сети — Уолт: он связан со всеми кластерами, его устранение разрушает всю империю.</a:t>
+                  <a:srgbClr val="1E2A24"/>
+                </a:solidFill>
+                <a:latin typeface="Calibri"/>
+              </a:rPr>
+              <a:t>Уязвимая точка сети — Уолт: связан со всеми кластерами; его устранение разрушает всю империю (подтверждается SNA-анализом).</a:t>
             </a:r>
           </a:p>
           <a:p>
             <a:pPr>
               <a:spcAft>
-                <a:spcPts val="1100"/>
+                <a:spcPts val="1300"/>
               </a:spcAft>
             </a:pPr>
             <a:r>
+              <a:rPr sz="1800" b="1" i="0">
+                <a:solidFill>
+                  <a:srgbClr val="5AA634"/>
+                </a:solidFill>
+                <a:latin typeface="Calibri"/>
+              </a:rPr>
+              <a:t>●  </a:t>
+            </a:r>
+            <a:r>
               <a:rPr sz="1800" b="0" i="0">
                 <a:solidFill>
-                  <a:srgbClr val="222222"/>
-                </a:solidFill>
-                <a:latin typeface="Calibri"/>
-              </a:rPr>
-              <a:t>• Потенциально «пропущенные» связи в реальном следствии: финансовый след денег и поставки метиламина (Лидия) — их раскрытие ускорило бы дело.</a:t>
+                  <a:srgbClr val="1E2A24"/>
+                </a:solidFill>
+                <a:latin typeface="Calibri"/>
+              </a:rPr>
+              <a:t>Потенциально «пропущенные» связи: финансовый след денег и поставки метиламина (Лидия) — их раскрытие ускорило бы дело.</a:t>
             </a:r>
           </a:p>
           <a:p>
             <a:pPr>
               <a:spcAft>
-                <a:spcPts val="1100"/>
+                <a:spcPts val="1300"/>
               </a:spcAft>
             </a:pPr>
             <a:r>
+              <a:rPr sz="1800" b="1" i="0">
+                <a:solidFill>
+                  <a:srgbClr val="5AA634"/>
+                </a:solidFill>
+                <a:latin typeface="Calibri"/>
+              </a:rPr>
+              <a:t>●  </a:t>
+            </a:r>
+            <a:r>
               <a:rPr sz="1800" b="0" i="0">
                 <a:solidFill>
-                  <a:srgbClr val="222222"/>
-                </a:solidFill>
-                <a:latin typeface="Calibri"/>
-              </a:rPr>
-              <a:t>• Уточнение ролей: Гус — одновременно «дистрибьютор» и «жертва»; Джесси — «сообщник» и «жертва манипуляций».</a:t>
-            </a:r>
-          </a:p>
-          <a:p>
-            <a:pPr>
-              <a:spcAft>
-                <a:spcPts val="1100"/>
-              </a:spcAft>
-            </a:pPr>
-            <a:r>
-              <a:rPr sz="1800" b="1" i="0">
-                <a:solidFill>
-                  <a:srgbClr val="2E7D32"/>
-                </a:solidFill>
-                <a:latin typeface="Calibri"/>
-              </a:rPr>
-              <a:t>• Значимость: схема наглядно показывает, как бытовая мотивация перерастает в организованную преступность.</a:t>
-            </a:r>
-          </a:p>
-        </p:txBody>
-      </p:sp>
-      <p:sp>
-        <p:nvSpPr>
-          <p:cNvPr id="5" name="TextBox 4"/>
+                  <a:srgbClr val="1E2A24"/>
+                </a:solidFill>
+                <a:latin typeface="Calibri"/>
+              </a:rPr>
+              <a:t>Двойные роли: Гус — «дистрибьютор» и «жертва»; Джесси — «сообщник» и «жертва манипуляций».</a:t>
+            </a:r>
+          </a:p>
+        </p:txBody>
+      </p:sp>
+      <p:sp>
+        <p:nvSpPr>
+          <p:cNvPr id="8" name="Rectangle 7"/>
+          <p:cNvSpPr/>
+          <p:nvPr/>
+        </p:nvSpPr>
+        <p:spPr>
+          <a:xfrm>
+            <a:off x="411480" y="6455664"/>
+            <a:ext cx="2926080" cy="27940"/>
+          </a:xfrm>
+          <a:prstGeom prst="rect">
+            <a:avLst/>
+          </a:prstGeom>
+          <a:solidFill>
+            <a:srgbClr val="5AA634"/>
+          </a:solidFill>
+          <a:ln>
+            <a:noFill/>
+          </a:ln>
+          <a:effectLst/>
+        </p:spPr>
+        <p:style>
+          <a:lnRef idx="1">
+            <a:schemeClr val="accent1"/>
+          </a:lnRef>
+          <a:fillRef idx="3">
+            <a:schemeClr val="accent1"/>
+          </a:fillRef>
+          <a:effectRef idx="2">
+            <a:schemeClr val="accent1"/>
+          </a:effectRef>
+          <a:fontRef idx="minor">
+            <a:schemeClr val="lt1"/>
+          </a:fontRef>
+        </p:style>
+        <p:txBody>
+          <a:bodyPr rtlCol="0" anchor="ctr"/>
+          <a:lstStyle/>
+          <a:p>
+            <a:pPr algn="ctr"/>
+          </a:p>
+        </p:txBody>
+      </p:sp>
+      <p:sp>
+        <p:nvSpPr>
+          <p:cNvPr id="9" name="TextBox 8"/>
           <p:cNvSpPr txBox="1"/>
           <p:nvPr/>
         </p:nvSpPr>
         <p:spPr>
           <a:xfrm>
-            <a:off x="10332720" y="6446520"/>
-            <a:ext cx="1737360" cy="365760"/>
+            <a:off x="9875520" y="6355080"/>
+            <a:ext cx="2194560" cy="365760"/>
           </a:xfrm>
           <a:prstGeom prst="rect">
             <a:avLst/>
@@ -5824,13 +8844,13 @@
           <a:p>
             <a:pPr algn="r"/>
             <a:r>
-              <a:rPr sz="1100" b="0" i="0">
-                <a:solidFill>
-                  <a:srgbClr val="555555"/>
-                </a:solidFill>
-                <a:latin typeface="Calibri"/>
-              </a:rPr>
-              <a:t>ЛР №9  •  9</a:t>
+              <a:rPr sz="1000" b="0" i="0">
+                <a:solidFill>
+                  <a:srgbClr val="5B6B63"/>
+                </a:solidFill>
+                <a:latin typeface="Calibri"/>
+              </a:rPr>
+              <a:t>Во все тяжкие · ЛР №9 · 9</a:t>
             </a:r>
           </a:p>
         </p:txBody>
